--- a/deliverables/presentation.pptx
+++ b/deliverables/presentation.pptx
@@ -5436,7 +5436,7 @@
         </p:blipFill>
         <p:spPr>
           <a:xfrm>
-            <a:off x="5052047" y="1473905"/>
+            <a:off x="5178167" y="1473905"/>
             <a:ext cx="6846571" cy="4695527"/>
           </a:xfrm>
           <a:prstGeom prst="rect">
@@ -5715,7 +5715,7 @@
         <p:spPr>
           <a:xfrm>
             <a:off x="461010" y="1638925"/>
-            <a:ext cx="4533887" cy="4401205"/>
+            <a:ext cx="4699569" cy="4401205"/>
           </a:xfrm>
           <a:prstGeom prst="rect">
             <a:avLst/>
@@ -5775,7 +5775,13 @@
               <a:rPr lang="it-IT" sz="2800" dirty="0">
                 <a:latin typeface="Aptos" panose="020B0004020202020204" pitchFamily="34" charset="0"/>
               </a:rPr>
-              <a:t>sequenze presentano distribuzioni di intensità diverse</a:t>
+              <a:t>sequenze presentano </a:t>
+            </a:r>
+            <a:r>
+              <a:rPr lang="it-IT" sz="2800" b="1" dirty="0">
+                <a:latin typeface="Aptos" panose="020B0004020202020204" pitchFamily="34" charset="0"/>
+              </a:rPr>
+              <a:t>distribuzioni di intensità diverse</a:t>
             </a:r>
           </a:p>
           <a:p>
@@ -5808,13 +5814,13 @@
               <a:rPr lang="it-IT" sz="2800" b="1" dirty="0">
                 <a:latin typeface="Aptos" panose="020B0004020202020204" pitchFamily="34" charset="0"/>
               </a:rPr>
-              <a:t> </a:t>
+              <a:t> quali modalità sono più informative </a:t>
             </a:r>
             <a:r>
               <a:rPr lang="it-IT" sz="2800" dirty="0">
                 <a:latin typeface="Aptos" panose="020B0004020202020204" pitchFamily="34" charset="0"/>
               </a:rPr>
-              <a:t>quali modalità sono più informative per la lesione</a:t>
+              <a:t>per la lesione</a:t>
             </a:r>
           </a:p>
         </p:txBody>
@@ -5896,7 +5902,7 @@
         </p:blipFill>
         <p:spPr>
           <a:xfrm>
-            <a:off x="5006326" y="1473905"/>
+            <a:off x="5121936" y="1473905"/>
             <a:ext cx="6892291" cy="4757291"/>
           </a:xfrm>
           <a:prstGeom prst="rect">
@@ -6175,7 +6181,7 @@
         <p:spPr>
           <a:xfrm>
             <a:off x="461010" y="1638925"/>
-            <a:ext cx="4808220" cy="4401205"/>
+            <a:ext cx="5035900" cy="4401205"/>
           </a:xfrm>
           <a:prstGeom prst="rect">
             <a:avLst/>
@@ -6223,7 +6229,13 @@
               <a:rPr lang="it-IT" sz="2800" dirty="0">
                 <a:latin typeface="Aptos" panose="020B0004020202020204" pitchFamily="34" charset="0"/>
               </a:rPr>
-              <a:t>CLAHE migliora la visualizzazione ed equalizza gli istogrammi</a:t>
+              <a:t>CLAHE migliora la visualizzazione ed </a:t>
+            </a:r>
+            <a:r>
+              <a:rPr lang="it-IT" sz="2800" b="1" dirty="0">
+                <a:latin typeface="Aptos" panose="020B0004020202020204" pitchFamily="34" charset="0"/>
+              </a:rPr>
+              <a:t>equalizza gli istogrammi</a:t>
             </a:r>
           </a:p>
           <a:p>
@@ -6250,7 +6262,19 @@
               <a:rPr lang="it-IT" sz="2800" dirty="0">
                 <a:latin typeface="Aptos" panose="020B0004020202020204" pitchFamily="34" charset="0"/>
               </a:rPr>
-              <a:t>non viene utilizzata nella pipeline (artefatti peggiorano la segmentazione)</a:t>
+              <a:t>non viene utilizzata nella pipeline (artefatti </a:t>
+            </a:r>
+            <a:r>
+              <a:rPr lang="it-IT" sz="2800" b="1" dirty="0">
+                <a:latin typeface="Aptos" panose="020B0004020202020204" pitchFamily="34" charset="0"/>
+              </a:rPr>
+              <a:t>peggiorano la segmentazione</a:t>
+            </a:r>
+            <a:r>
+              <a:rPr lang="it-IT" sz="2800" dirty="0">
+                <a:latin typeface="Aptos" panose="020B0004020202020204" pitchFamily="34" charset="0"/>
+              </a:rPr>
+              <a:t>)</a:t>
             </a:r>
           </a:p>
         </p:txBody>
@@ -6351,7 +6375,19 @@
               <a:rPr lang="it-IT" sz="2800" dirty="0">
                 <a:latin typeface="Aptos" panose="020B0004020202020204" pitchFamily="34" charset="0"/>
               </a:rPr>
-              <a:t>Visualizzazione interattiva e dinamica del volume</a:t>
+              <a:t>Visualizzazione </a:t>
+            </a:r>
+            <a:r>
+              <a:rPr lang="it-IT" sz="2800" b="1" dirty="0">
+                <a:latin typeface="Aptos" panose="020B0004020202020204" pitchFamily="34" charset="0"/>
+              </a:rPr>
+              <a:t>interattiva e dinamica</a:t>
+            </a:r>
+            <a:r>
+              <a:rPr lang="it-IT" sz="2800" dirty="0">
+                <a:latin typeface="Aptos" panose="020B0004020202020204" pitchFamily="34" charset="0"/>
+              </a:rPr>
+              <a:t> del volume</a:t>
             </a:r>
           </a:p>
           <a:p>
@@ -6372,7 +6408,19 @@
               <a:rPr lang="it-IT" sz="2800" dirty="0">
                 <a:latin typeface="Aptos" panose="020B0004020202020204" pitchFamily="34" charset="0"/>
               </a:rPr>
-              <a:t>Utile per comprendere la reale estensione e localizzazione della lesione</a:t>
+              <a:t>Utile per comprendere la </a:t>
+            </a:r>
+            <a:r>
+              <a:rPr lang="it-IT" sz="2800" b="1" dirty="0">
+                <a:latin typeface="Aptos" panose="020B0004020202020204" pitchFamily="34" charset="0"/>
+              </a:rPr>
+              <a:t>reale estensione e localizzazione </a:t>
+            </a:r>
+            <a:r>
+              <a:rPr lang="it-IT" sz="2800" dirty="0">
+                <a:latin typeface="Aptos" panose="020B0004020202020204" pitchFamily="34" charset="0"/>
+              </a:rPr>
+              <a:t>della lesione</a:t>
             </a:r>
           </a:p>
         </p:txBody>
@@ -7031,7 +7079,37 @@
               <a:rPr lang="it-IT" sz="2800" dirty="0">
                 <a:latin typeface="Aptos" panose="020B0004020202020204" pitchFamily="34" charset="0"/>
               </a:rPr>
-              <a:t>scelta automatica della slice con massima estensione tumorale nella ground truth</a:t>
+              <a:t>scelta </a:t>
+            </a:r>
+            <a:r>
+              <a:rPr lang="it-IT" sz="2800" b="1" dirty="0">
+                <a:latin typeface="Aptos" panose="020B0004020202020204" pitchFamily="34" charset="0"/>
+              </a:rPr>
+              <a:t>automatica</a:t>
+            </a:r>
+            <a:r>
+              <a:rPr lang="it-IT" sz="2800" dirty="0">
+                <a:latin typeface="Aptos" panose="020B0004020202020204" pitchFamily="34" charset="0"/>
+              </a:rPr>
+              <a:t> della slice con </a:t>
+            </a:r>
+            <a:r>
+              <a:rPr lang="it-IT" sz="2800" b="1" dirty="0">
+                <a:latin typeface="Aptos" panose="020B0004020202020204" pitchFamily="34" charset="0"/>
+              </a:rPr>
+              <a:t>massima estensione </a:t>
+            </a:r>
+            <a:r>
+              <a:rPr lang="it-IT" sz="2800" dirty="0">
+                <a:latin typeface="Aptos" panose="020B0004020202020204" pitchFamily="34" charset="0"/>
+              </a:rPr>
+              <a:t>tumorale nella </a:t>
+            </a:r>
+            <a:r>
+              <a:rPr lang="it-IT" sz="2800" b="1" dirty="0">
+                <a:latin typeface="Aptos" panose="020B0004020202020204" pitchFamily="34" charset="0"/>
+              </a:rPr>
+              <a:t>ground truth</a:t>
             </a:r>
           </a:p>
           <a:p>
@@ -7058,7 +7136,19 @@
               <a:rPr lang="it-IT" sz="2800" dirty="0">
                 <a:latin typeface="Aptos" panose="020B0004020202020204" pitchFamily="34" charset="0"/>
               </a:rPr>
-              <a:t>ridurre il problema 3D a un’analisi 2D controllabile e confrontabile</a:t>
+              <a:t>ridurre il problema </a:t>
+            </a:r>
+            <a:r>
+              <a:rPr lang="it-IT" sz="2800" b="1" dirty="0">
+                <a:latin typeface="Aptos" panose="020B0004020202020204" pitchFamily="34" charset="0"/>
+              </a:rPr>
+              <a:t>3D a un’analisi 2D </a:t>
+            </a:r>
+            <a:r>
+              <a:rPr lang="it-IT" sz="2800" dirty="0">
+                <a:latin typeface="Aptos" panose="020B0004020202020204" pitchFamily="34" charset="0"/>
+              </a:rPr>
+              <a:t>controllabile e confrontabile</a:t>
             </a:r>
           </a:p>
         </p:txBody>
@@ -8191,8 +8281,8 @@
         </p:nvSpPr>
         <p:spPr>
           <a:xfrm>
-            <a:off x="552450" y="1974647"/>
-            <a:ext cx="5916930" cy="3970318"/>
+            <a:off x="552449" y="1974647"/>
+            <a:ext cx="6109333" cy="3970318"/>
           </a:xfrm>
           <a:prstGeom prst="rect">
             <a:avLst/>
@@ -8228,7 +8318,19 @@
               <a:rPr lang="it-IT" sz="2800" dirty="0">
                 <a:latin typeface="Aptos" panose="020B0004020202020204" pitchFamily="34" charset="0"/>
               </a:rPr>
-              <a:t>rendere confrontabili le intensità tra pazienti e sequenze, facilitando la segmentazione</a:t>
+              <a:t>rendere </a:t>
+            </a:r>
+            <a:r>
+              <a:rPr lang="it-IT" sz="2800" b="1" dirty="0">
+                <a:latin typeface="Aptos" panose="020B0004020202020204" pitchFamily="34" charset="0"/>
+              </a:rPr>
+              <a:t>confrontabili le intensità</a:t>
+            </a:r>
+            <a:r>
+              <a:rPr lang="it-IT" sz="2800" dirty="0">
+                <a:latin typeface="Aptos" panose="020B0004020202020204" pitchFamily="34" charset="0"/>
+              </a:rPr>
+              <a:t> tra pazienti e sequenze, facilitando la segmentazione</a:t>
             </a:r>
           </a:p>
           <a:p>
@@ -8690,8 +8792,8 @@
         </p:nvSpPr>
         <p:spPr>
           <a:xfrm>
-            <a:off x="609600" y="1974647"/>
-            <a:ext cx="5654040" cy="3970318"/>
+            <a:off x="609599" y="1974647"/>
+            <a:ext cx="5833241" cy="3970318"/>
           </a:xfrm>
           <a:prstGeom prst="rect">
             <a:avLst/>
@@ -8727,7 +8829,19 @@
               <a:rPr lang="it-IT" sz="2800" dirty="0">
                 <a:latin typeface="Aptos" panose="020B0004020202020204" pitchFamily="34" charset="0"/>
               </a:rPr>
-              <a:t>ridurre il rumore preservando i contorni principali della lesione.</a:t>
+              <a:t>ridurre il rumore </a:t>
+            </a:r>
+            <a:r>
+              <a:rPr lang="it-IT" sz="2800" b="1" dirty="0">
+                <a:latin typeface="Aptos" panose="020B0004020202020204" pitchFamily="34" charset="0"/>
+              </a:rPr>
+              <a:t>preservando i contorni </a:t>
+            </a:r>
+            <a:r>
+              <a:rPr lang="it-IT" sz="2800" dirty="0">
+                <a:latin typeface="Aptos" panose="020B0004020202020204" pitchFamily="34" charset="0"/>
+              </a:rPr>
+              <a:t>principali della lesione.</a:t>
             </a:r>
           </a:p>
           <a:p>
@@ -9515,7 +9629,7 @@
         <p:spPr>
           <a:xfrm>
             <a:off x="523874" y="1621106"/>
-            <a:ext cx="6181726" cy="4401205"/>
+            <a:ext cx="6181726" cy="3970318"/>
           </a:xfrm>
           <a:prstGeom prst="rect">
             <a:avLst/>
@@ -9533,16 +9647,7 @@
               <a:rPr lang="it-IT" sz="2800" b="1" dirty="0">
                 <a:latin typeface="Aptos" panose="020B0004020202020204" pitchFamily="34" charset="0"/>
               </a:rPr>
-              <a:t>Fusione Multimodale</a:t>
-            </a:r>
-          </a:p>
-          <a:p>
-            <a:pPr algn="l"/>
-            <a:r>
-              <a:rPr lang="it-IT" sz="2800" b="1" dirty="0">
-                <a:latin typeface="Aptos" panose="020B0004020202020204" pitchFamily="34" charset="0"/>
-              </a:rPr>
-              <a:t>(Fusion2 e Fusion3)</a:t>
+              <a:t>Fusione Multimodale (Fus2 e Fus3)</a:t>
             </a:r>
           </a:p>
           <a:p>
@@ -9560,7 +9665,19 @@
               <a:rPr lang="it-IT" sz="2800" dirty="0">
                 <a:latin typeface="Aptos" panose="020B0004020202020204" pitchFamily="34" charset="0"/>
               </a:rPr>
-              <a:t>integrare informazioni complementari per migliorare la segmentazione</a:t>
+              <a:t>integrare </a:t>
+            </a:r>
+            <a:r>
+              <a:rPr lang="it-IT" sz="2800" b="1" dirty="0">
+                <a:latin typeface="Aptos" panose="020B0004020202020204" pitchFamily="34" charset="0"/>
+              </a:rPr>
+              <a:t>informazioni complementari </a:t>
+            </a:r>
+            <a:r>
+              <a:rPr lang="it-IT" sz="2800" dirty="0">
+                <a:latin typeface="Aptos" panose="020B0004020202020204" pitchFamily="34" charset="0"/>
+              </a:rPr>
+              <a:t>per migliorare la segmentazione</a:t>
             </a:r>
           </a:p>
           <a:p>
@@ -10568,7 +10685,7 @@
         <p:spPr>
           <a:xfrm>
             <a:off x="628650" y="1668731"/>
-            <a:ext cx="6286500" cy="3539430"/>
+            <a:ext cx="6286500" cy="3970318"/>
           </a:xfrm>
           <a:prstGeom prst="rect">
             <a:avLst/>
@@ -10619,31 +10736,61 @@
               <a:rPr lang="it-IT" sz="2800" dirty="0">
                 <a:latin typeface="Aptos" panose="020B0004020202020204" pitchFamily="34" charset="0"/>
               </a:rPr>
-              <a:t>selezionare il seme iniziale per guidare il </a:t>
-            </a:r>
-            <a:r>
-              <a:rPr lang="it-IT" sz="2800" dirty="0" err="1">
+              <a:t>selezionare il </a:t>
+            </a:r>
+            <a:r>
+              <a:rPr lang="it-IT" sz="2800" b="1" dirty="0">
+                <a:latin typeface="Aptos" panose="020B0004020202020204" pitchFamily="34" charset="0"/>
+              </a:rPr>
+              <a:t>seme iniziale</a:t>
+            </a:r>
+            <a:r>
+              <a:rPr lang="it-IT" sz="2800" dirty="0">
+                <a:latin typeface="Aptos" panose="020B0004020202020204" pitchFamily="34" charset="0"/>
+              </a:rPr>
+              <a:t> per guidare il </a:t>
+            </a:r>
+            <a:r>
+              <a:rPr lang="it-IT" sz="2800" b="1" dirty="0" err="1">
                 <a:latin typeface="Aptos" panose="020B0004020202020204" pitchFamily="34" charset="0"/>
               </a:rPr>
               <a:t>Region</a:t>
             </a:r>
             <a:r>
+              <a:rPr lang="it-IT" sz="2800" b="1" dirty="0">
+                <a:latin typeface="Aptos" panose="020B0004020202020204" pitchFamily="34" charset="0"/>
+              </a:rPr>
+              <a:t> </a:t>
+            </a:r>
+            <a:r>
+              <a:rPr lang="it-IT" sz="2800" b="1" dirty="0" err="1">
+                <a:latin typeface="Aptos" panose="020B0004020202020204" pitchFamily="34" charset="0"/>
+              </a:rPr>
+              <a:t>Growing</a:t>
+            </a:r>
+            <a:r>
               <a:rPr lang="it-IT" sz="2800" dirty="0">
                 <a:latin typeface="Aptos" panose="020B0004020202020204" pitchFamily="34" charset="0"/>
               </a:rPr>
-              <a:t> </a:t>
-            </a:r>
-            <a:r>
-              <a:rPr lang="it-IT" sz="2800" dirty="0" err="1">
-                <a:latin typeface="Aptos" panose="020B0004020202020204" pitchFamily="34" charset="0"/>
-              </a:rPr>
-              <a:t>Growing</a:t>
+              <a:t> e </a:t>
+            </a:r>
+            <a:r>
+              <a:rPr lang="it-IT" sz="2800" b="1" dirty="0">
+                <a:latin typeface="Aptos" panose="020B0004020202020204" pitchFamily="34" charset="0"/>
+              </a:rPr>
+              <a:t>ridurre l’influenza del rumore</a:t>
             </a:r>
             <a:r>
               <a:rPr lang="it-IT" sz="2800" dirty="0">
                 <a:latin typeface="Aptos" panose="020B0004020202020204" pitchFamily="34" charset="0"/>
               </a:rPr>
-              <a:t> e ridurre l’influenza del rumore nella scelta del seme con filtro gaussiano</a:t>
+              <a:t> nella scelta del seme con </a:t>
+            </a:r>
+            <a:r>
+              <a:rPr lang="it-IT" sz="2800" b="1" dirty="0">
+                <a:latin typeface="Aptos" panose="020B0004020202020204" pitchFamily="34" charset="0"/>
+              </a:rPr>
+              <a:t>filtro gaussiano</a:t>
             </a:r>
           </a:p>
           <a:p>
@@ -11418,10 +11565,16 @@
               <a:buAutoNum type="arabicPeriod"/>
             </a:pPr>
             <a:r>
+              <a:rPr lang="it-IT" sz="2800" b="1" dirty="0">
+                <a:latin typeface="Aptos" panose="020B0004020202020204" pitchFamily="34" charset="0"/>
+              </a:rPr>
+              <a:t>Segmentazione iniziale </a:t>
+            </a:r>
+            <a:r>
               <a:rPr lang="it-IT" sz="2800" dirty="0">
                 <a:latin typeface="Aptos" panose="020B0004020202020204" pitchFamily="34" charset="0"/>
               </a:rPr>
-              <a:t>Segmentazione iniziale basata su </a:t>
+              <a:t>basata su </a:t>
             </a:r>
             <a:r>
               <a:rPr lang="it-IT" sz="2800" dirty="0" err="1">
@@ -11445,7 +11598,25 @@
               <a:rPr lang="it-IT" sz="2800" dirty="0">
                 <a:latin typeface="Aptos" panose="020B0004020202020204" pitchFamily="34" charset="0"/>
               </a:rPr>
-              <a:t>Separa le classi massimizzando la variabilità inter-classe e minimizzando quella intra-classe</a:t>
+              <a:t>Separa le classi massimizzando la </a:t>
+            </a:r>
+            <a:r>
+              <a:rPr lang="it-IT" sz="2800" b="1" dirty="0">
+                <a:latin typeface="Aptos" panose="020B0004020202020204" pitchFamily="34" charset="0"/>
+              </a:rPr>
+              <a:t>variabilità inter-classe </a:t>
+            </a:r>
+            <a:r>
+              <a:rPr lang="it-IT" sz="2800" dirty="0">
+                <a:latin typeface="Aptos" panose="020B0004020202020204" pitchFamily="34" charset="0"/>
+              </a:rPr>
+              <a:t>e minimizzando quella </a:t>
+            </a:r>
+            <a:r>
+              <a:rPr lang="it-IT" sz="2800" b="1" dirty="0">
+                <a:latin typeface="Aptos" panose="020B0004020202020204" pitchFamily="34" charset="0"/>
+              </a:rPr>
+              <a:t>intra-classe</a:t>
             </a:r>
           </a:p>
           <a:p>
@@ -11457,7 +11628,13 @@
               <a:rPr lang="it-IT" sz="2800" dirty="0">
                 <a:latin typeface="Aptos" panose="020B0004020202020204" pitchFamily="34" charset="0"/>
               </a:rPr>
-              <a:t>Selezione della classe con intensità più alta</a:t>
+              <a:t>Selezione della </a:t>
+            </a:r>
+            <a:r>
+              <a:rPr lang="it-IT" sz="2800" b="1" dirty="0">
+                <a:latin typeface="Aptos" panose="020B0004020202020204" pitchFamily="34" charset="0"/>
+              </a:rPr>
+              <a:t>classe con intensità più alta</a:t>
             </a:r>
           </a:p>
           <a:p>
@@ -11469,7 +11646,13 @@
               <a:rPr lang="it-IT" sz="2800" dirty="0">
                 <a:latin typeface="Aptos" panose="020B0004020202020204" pitchFamily="34" charset="0"/>
               </a:rPr>
-              <a:t>Produce la prima maschera</a:t>
+              <a:t>Produce la </a:t>
+            </a:r>
+            <a:r>
+              <a:rPr lang="it-IT" sz="2800" b="1" dirty="0">
+                <a:latin typeface="Aptos" panose="020B0004020202020204" pitchFamily="34" charset="0"/>
+              </a:rPr>
+              <a:t>prima maschera</a:t>
             </a:r>
           </a:p>
         </p:txBody>
@@ -11536,7 +11719,7 @@
         </p:nvGrpSpPr>
         <p:grpSpPr>
           <a:xfrm>
-            <a:off x="7363094" y="1724912"/>
+            <a:off x="7512183" y="1724912"/>
             <a:ext cx="4590769" cy="4253730"/>
             <a:chOff x="7329838" y="1463302"/>
             <a:chExt cx="4590769" cy="4253730"/>
@@ -11922,7 +12105,7 @@
         <p:spPr>
           <a:xfrm>
             <a:off x="639873" y="1945848"/>
-            <a:ext cx="6799152" cy="3970318"/>
+            <a:ext cx="7011658" cy="3970318"/>
           </a:xfrm>
           <a:prstGeom prst="rect">
             <a:avLst/>
@@ -11970,7 +12153,19 @@
               <a:rPr lang="it-IT" sz="2800" dirty="0">
                 <a:latin typeface="Aptos" panose="020B0004020202020204" pitchFamily="34" charset="0"/>
               </a:rPr>
-              <a:t>Segmentazione per crescita della regione dal seme iniziale</a:t>
+              <a:t>Segmentazione per </a:t>
+            </a:r>
+            <a:r>
+              <a:rPr lang="it-IT" sz="2800" b="1" dirty="0">
+                <a:latin typeface="Aptos" panose="020B0004020202020204" pitchFamily="34" charset="0"/>
+              </a:rPr>
+              <a:t>crescita della regione</a:t>
+            </a:r>
+            <a:r>
+              <a:rPr lang="it-IT" sz="2800" dirty="0">
+                <a:latin typeface="Aptos" panose="020B0004020202020204" pitchFamily="34" charset="0"/>
+              </a:rPr>
+              <a:t> dal seme iniziale</a:t>
             </a:r>
           </a:p>
           <a:p>
@@ -11982,7 +12177,37 @@
               <a:rPr lang="it-IT" sz="2800" dirty="0">
                 <a:latin typeface="Aptos" panose="020B0004020202020204" pitchFamily="34" charset="0"/>
               </a:rPr>
-              <a:t>Si espande iterativamente verso i pixel adiacenti con un criterio di omogeneità</a:t>
+              <a:t>Si espande </a:t>
+            </a:r>
+            <a:r>
+              <a:rPr lang="it-IT" sz="2800" b="1" dirty="0">
+                <a:latin typeface="Aptos" panose="020B0004020202020204" pitchFamily="34" charset="0"/>
+              </a:rPr>
+              <a:t>iterativamente</a:t>
+            </a:r>
+            <a:r>
+              <a:rPr lang="it-IT" sz="2800" dirty="0">
+                <a:latin typeface="Aptos" panose="020B0004020202020204" pitchFamily="34" charset="0"/>
+              </a:rPr>
+              <a:t> verso i </a:t>
+            </a:r>
+            <a:r>
+              <a:rPr lang="it-IT" sz="2800" b="1" dirty="0">
+                <a:latin typeface="Aptos" panose="020B0004020202020204" pitchFamily="34" charset="0"/>
+              </a:rPr>
+              <a:t>pixel adiacenti</a:t>
+            </a:r>
+            <a:r>
+              <a:rPr lang="it-IT" sz="2800" dirty="0">
+                <a:latin typeface="Aptos" panose="020B0004020202020204" pitchFamily="34" charset="0"/>
+              </a:rPr>
+              <a:t> con un </a:t>
+            </a:r>
+            <a:r>
+              <a:rPr lang="it-IT" sz="2800" b="1" dirty="0">
+                <a:latin typeface="Aptos" panose="020B0004020202020204" pitchFamily="34" charset="0"/>
+              </a:rPr>
+              <a:t>criterio di omogeneità</a:t>
             </a:r>
           </a:p>
           <a:p>
@@ -11994,7 +12219,25 @@
               <a:rPr lang="it-IT" sz="2800" dirty="0">
                 <a:latin typeface="Aptos" panose="020B0004020202020204" pitchFamily="34" charset="0"/>
               </a:rPr>
-              <a:t>Soglia calcolata come 6° percentile delle intensità nella maschera di Otsu</a:t>
+              <a:t>Soglia calcolata come </a:t>
+            </a:r>
+            <a:r>
+              <a:rPr lang="it-IT" sz="2800" b="1" dirty="0">
+                <a:latin typeface="Aptos" panose="020B0004020202020204" pitchFamily="34" charset="0"/>
+              </a:rPr>
+              <a:t>6° percentile </a:t>
+            </a:r>
+            <a:r>
+              <a:rPr lang="it-IT" sz="2800" dirty="0">
+                <a:latin typeface="Aptos" panose="020B0004020202020204" pitchFamily="34" charset="0"/>
+              </a:rPr>
+              <a:t>delle intensità nella </a:t>
+            </a:r>
+            <a:r>
+              <a:rPr lang="it-IT" sz="2800" b="1" dirty="0">
+                <a:latin typeface="Aptos" panose="020B0004020202020204" pitchFamily="34" charset="0"/>
+              </a:rPr>
+              <a:t>maschera di Otsu</a:t>
             </a:r>
           </a:p>
           <a:p>
@@ -12006,7 +12249,19 @@
               <a:rPr lang="it-IT" sz="2800" dirty="0">
                 <a:latin typeface="Aptos" panose="020B0004020202020204" pitchFamily="34" charset="0"/>
               </a:rPr>
-              <a:t>Seleziona la componente connessa attorno al seme</a:t>
+              <a:t>Seleziona la </a:t>
+            </a:r>
+            <a:r>
+              <a:rPr lang="it-IT" sz="2800" b="1" dirty="0">
+                <a:latin typeface="Aptos" panose="020B0004020202020204" pitchFamily="34" charset="0"/>
+              </a:rPr>
+              <a:t>componente connessa </a:t>
+            </a:r>
+            <a:r>
+              <a:rPr lang="it-IT" sz="2800" dirty="0">
+                <a:latin typeface="Aptos" panose="020B0004020202020204" pitchFamily="34" charset="0"/>
+              </a:rPr>
+              <a:t>attorno al seme</a:t>
             </a:r>
           </a:p>
         </p:txBody>
@@ -12901,8 +13156,8 @@
         </p:nvSpPr>
         <p:spPr>
           <a:xfrm>
-            <a:off x="639873" y="1872892"/>
-            <a:ext cx="7103952" cy="3970318"/>
+            <a:off x="639872" y="1872892"/>
+            <a:ext cx="7239399" cy="3539430"/>
           </a:xfrm>
           <a:prstGeom prst="rect">
             <a:avLst/>
@@ -12938,7 +13193,19 @@
               <a:rPr lang="it-IT" sz="2800" dirty="0">
                 <a:latin typeface="Aptos" panose="020B0004020202020204" pitchFamily="34" charset="0"/>
               </a:rPr>
-              <a:t>Segmentazione finale basata sulla morfologia della superficie dell’immagine</a:t>
+              <a:t>Segmentazione finale basata sulla </a:t>
+            </a:r>
+            <a:r>
+              <a:rPr lang="it-IT" sz="2800" b="1" dirty="0">
+                <a:latin typeface="Aptos" panose="020B0004020202020204" pitchFamily="34" charset="0"/>
+              </a:rPr>
+              <a:t>morfologia</a:t>
+            </a:r>
+            <a:r>
+              <a:rPr lang="it-IT" sz="2800" dirty="0">
+                <a:latin typeface="Aptos" panose="020B0004020202020204" pitchFamily="34" charset="0"/>
+              </a:rPr>
+              <a:t> della superficie dell’immagine</a:t>
             </a:r>
           </a:p>
           <a:p>
@@ -12950,7 +13217,13 @@
               <a:rPr lang="it-IT" sz="2800" dirty="0">
                 <a:latin typeface="Aptos" panose="020B0004020202020204" pitchFamily="34" charset="0"/>
               </a:rPr>
-              <a:t>Separa le regioni a partire dai minimi locali della trasformata di distanza</a:t>
+              <a:t>Separa le regioni a partire dai </a:t>
+            </a:r>
+            <a:r>
+              <a:rPr lang="it-IT" sz="2800" b="1" dirty="0">
+                <a:latin typeface="Aptos" panose="020B0004020202020204" pitchFamily="34" charset="0"/>
+              </a:rPr>
+              <a:t>minimi locali della trasformata di distanza</a:t>
             </a:r>
           </a:p>
           <a:p>
@@ -12962,7 +13235,19 @@
               <a:rPr lang="it-IT" sz="2800" dirty="0">
                 <a:latin typeface="Aptos" panose="020B0004020202020204" pitchFamily="34" charset="0"/>
               </a:rPr>
-              <a:t>Utilizza marcatori espliciti derivati dal </a:t>
+              <a:t>Utilizza </a:t>
+            </a:r>
+            <a:r>
+              <a:rPr lang="it-IT" sz="2800" b="1" dirty="0">
+                <a:latin typeface="Aptos" panose="020B0004020202020204" pitchFamily="34" charset="0"/>
+              </a:rPr>
+              <a:t>marcatori espliciti </a:t>
+            </a:r>
+            <a:r>
+              <a:rPr lang="it-IT" sz="2800" dirty="0">
+                <a:latin typeface="Aptos" panose="020B0004020202020204" pitchFamily="34" charset="0"/>
+              </a:rPr>
+              <a:t>dal </a:t>
             </a:r>
             <a:r>
               <a:rPr lang="it-IT" sz="2800" dirty="0" err="1">
@@ -12995,8 +13280,17 @@
               <a:rPr lang="it-IT" sz="2800" dirty="0">
                 <a:latin typeface="Aptos" panose="020B0004020202020204" pitchFamily="34" charset="0"/>
               </a:rPr>
-              <a:t>Produce una maschera finale più precisa e meno frammentata</a:t>
-            </a:r>
+              <a:t>Produce una </a:t>
+            </a:r>
+            <a:r>
+              <a:rPr lang="it-IT" sz="2800" b="1" dirty="0">
+                <a:latin typeface="Aptos" panose="020B0004020202020204" pitchFamily="34" charset="0"/>
+              </a:rPr>
+              <a:t>maschera finale più precisa</a:t>
+            </a:r>
+            <a:endParaRPr lang="it-IT" sz="2800" dirty="0">
+              <a:latin typeface="Aptos" panose="020B0004020202020204" pitchFamily="34" charset="0"/>
+            </a:endParaRPr>
           </a:p>
         </p:txBody>
       </p:sp>
@@ -13014,7 +13308,7 @@
         </p:nvGrpSpPr>
         <p:grpSpPr>
           <a:xfrm>
-            <a:off x="8132561" y="1677287"/>
+            <a:off x="8174601" y="1677287"/>
             <a:ext cx="3600578" cy="4515780"/>
             <a:chOff x="7839203" y="1724912"/>
             <a:chExt cx="3600578" cy="4515780"/>
@@ -13511,13 +13805,13 @@
               <a:rPr lang="it-IT" sz="2800" b="1" dirty="0">
                 <a:latin typeface="Aptos" panose="020B0004020202020204" pitchFamily="34" charset="0"/>
               </a:rPr>
-              <a:t>Obiettivo: </a:t>
+              <a:t>Obiettivo: rifinire la maschera ottenuta </a:t>
             </a:r>
             <a:r>
               <a:rPr lang="it-IT" sz="2800" dirty="0">
                 <a:latin typeface="Aptos" panose="020B0004020202020204" pitchFamily="34" charset="0"/>
               </a:rPr>
-              <a:t>rifinire la maschera ottenuta e rimuovere regioni spurie</a:t>
+              <a:t>e rimuovere regioni spurie</a:t>
             </a:r>
           </a:p>
           <a:p>
@@ -14546,10 +14840,16 @@
               <a:buChar char="•"/>
             </a:pPr>
             <a:r>
+              <a:rPr lang="it-IT" sz="2800" b="1" dirty="0">
+                <a:latin typeface="Aptos" panose="020B0004020202020204" pitchFamily="34" charset="0"/>
+              </a:rPr>
+              <a:t>Fusion3 migliore in media </a:t>
+            </a:r>
+            <a:r>
               <a:rPr lang="it-IT" sz="2800" dirty="0">
                 <a:latin typeface="Aptos" panose="020B0004020202020204" pitchFamily="34" charset="0"/>
               </a:rPr>
-              <a:t>Fusion3 migliore in media su tutto il dataset</a:t>
+              <a:t>su tutto il dataset</a:t>
             </a:r>
           </a:p>
           <a:p>
@@ -14600,7 +14900,7 @@
         </p:blipFill>
         <p:spPr>
           <a:xfrm>
-            <a:off x="8705850" y="1772927"/>
+            <a:off x="8705850" y="1989636"/>
             <a:ext cx="3181338" cy="1245705"/>
           </a:xfrm>
           <a:prstGeom prst="rect">
@@ -15068,7 +15368,13 @@
               <a:rPr lang="it-IT" sz="2800" dirty="0">
                 <a:latin typeface="Aptos" panose="020B0004020202020204" pitchFamily="34" charset="0"/>
               </a:rPr>
-              <a:t>La multimodalità non migliora sempre</a:t>
+              <a:t>La multimodalità </a:t>
+            </a:r>
+            <a:r>
+              <a:rPr lang="it-IT" sz="2800" b="1" dirty="0">
+                <a:latin typeface="Aptos" panose="020B0004020202020204" pitchFamily="34" charset="0"/>
+              </a:rPr>
+              <a:t>non sempre migliore</a:t>
             </a:r>
           </a:p>
           <a:p>
@@ -15077,10 +15383,16 @@
               <a:buChar char="•"/>
             </a:pPr>
             <a:r>
+              <a:rPr lang="it-IT" sz="2800" b="1" dirty="0">
+                <a:latin typeface="Aptos" panose="020B0004020202020204" pitchFamily="34" charset="0"/>
+              </a:rPr>
+              <a:t>Fusion3 è spesso la migliore</a:t>
+            </a:r>
+            <a:r>
               <a:rPr lang="it-IT" sz="2800" dirty="0">
                 <a:latin typeface="Aptos" panose="020B0004020202020204" pitchFamily="34" charset="0"/>
               </a:rPr>
-              <a:t>Fusion3 è spesso la migliore, ma non in tutti i casi</a:t>
+              <a:t>, ma non in tutti i casi</a:t>
             </a:r>
           </a:p>
           <a:p>
@@ -15092,7 +15404,13 @@
               <a:rPr lang="it-IT" sz="2800" dirty="0">
                 <a:latin typeface="Aptos" panose="020B0004020202020204" pitchFamily="34" charset="0"/>
               </a:rPr>
-              <a:t>Esistono casi in cui la pipeline fallisce completamente</a:t>
+              <a:t>Esistono casi in cui la pipeline </a:t>
+            </a:r>
+            <a:r>
+              <a:rPr lang="it-IT" sz="2800" b="1" dirty="0">
+                <a:latin typeface="Aptos" panose="020B0004020202020204" pitchFamily="34" charset="0"/>
+              </a:rPr>
+              <a:t>fallisce completamente</a:t>
             </a:r>
           </a:p>
         </p:txBody>
@@ -15955,10 +16273,10 @@
         </p:nvGrpSpPr>
         <p:grpSpPr>
           <a:xfrm>
-            <a:off x="263598" y="1581873"/>
-            <a:ext cx="11855303" cy="4346242"/>
-            <a:chOff x="247649" y="1625013"/>
-            <a:chExt cx="11855303" cy="4346242"/>
+            <a:off x="263598" y="1756901"/>
+            <a:ext cx="11855303" cy="4076623"/>
+            <a:chOff x="247649" y="1894631"/>
+            <a:chExt cx="11855303" cy="4076623"/>
           </a:xfrm>
         </p:grpSpPr>
         <p:pic>
@@ -15983,15 +16301,15 @@
                 </a:ext>
               </a:extLst>
             </a:blip>
-            <a:srcRect l="12650" r="6833" b="1963"/>
+            <a:srcRect l="12650" t="6082" r="6833" b="1962"/>
             <a:stretch>
               <a:fillRect/>
             </a:stretch>
           </p:blipFill>
           <p:spPr>
             <a:xfrm>
-              <a:off x="6169928" y="1625013"/>
-              <a:ext cx="5933024" cy="4346242"/>
+              <a:off x="6169928" y="1894631"/>
+              <a:ext cx="5933024" cy="4076623"/>
             </a:xfrm>
             <a:prstGeom prst="rect">
               <a:avLst/>
@@ -16020,15 +16338,15 @@
                 </a:ext>
               </a:extLst>
             </a:blip>
-            <a:srcRect l="12534" r="6949" b="9367"/>
+            <a:srcRect l="12534" t="6081" r="6949" b="9367"/>
             <a:stretch>
               <a:fillRect/>
             </a:stretch>
           </p:blipFill>
           <p:spPr>
             <a:xfrm>
-              <a:off x="247649" y="1625013"/>
-              <a:ext cx="5933024" cy="4017993"/>
+              <a:off x="247649" y="1894632"/>
+              <a:ext cx="5933024" cy="3748374"/>
             </a:xfrm>
             <a:prstGeom prst="rect">
               <a:avLst/>
@@ -16344,7 +16662,7 @@
         </p:nvSpPr>
         <p:spPr>
           <a:xfrm>
-            <a:off x="263598" y="5662302"/>
+            <a:off x="263598" y="5651792"/>
             <a:ext cx="11751499" cy="707886"/>
           </a:xfrm>
           <a:prstGeom prst="rect">
@@ -16363,7 +16681,7 @@
               <a:buChar char="•"/>
             </a:pPr>
             <a:r>
-              <a:rPr lang="it-IT" sz="2000" dirty="0">
+              <a:rPr lang="it-IT" sz="2000" b="1" dirty="0">
                 <a:latin typeface="Aptos" panose="020B0004020202020204" pitchFamily="34" charset="0"/>
               </a:rPr>
               <a:t>BRATS_128: </a:t>
@@ -16382,10 +16700,16 @@
               <a:buChar char="•"/>
             </a:pPr>
             <a:r>
+              <a:rPr lang="it-IT" sz="2000" b="1" dirty="0">
+                <a:latin typeface="Aptos" panose="020B0004020202020204" pitchFamily="34" charset="0"/>
+              </a:rPr>
+              <a:t>BRATS_248: </a:t>
+            </a:r>
+            <a:r>
               <a:rPr lang="it-IT" sz="2000" dirty="0">
                 <a:latin typeface="Aptos" panose="020B0004020202020204" pitchFamily="34" charset="0"/>
               </a:rPr>
-              <a:t>BRATS_248: FLAIR già sufficiente e </a:t>
+              <a:t>FLAIR già sufficiente e </a:t>
             </a:r>
             <a:r>
               <a:rPr lang="it-IT" sz="2000" dirty="0"/>
@@ -16459,10 +16783,10 @@
         </p:nvGrpSpPr>
         <p:grpSpPr>
           <a:xfrm>
-            <a:off x="206448" y="1603320"/>
-            <a:ext cx="11928402" cy="4385262"/>
-            <a:chOff x="206448" y="1751840"/>
-            <a:chExt cx="11928402" cy="4385262"/>
+            <a:off x="216958" y="1768327"/>
+            <a:ext cx="11928402" cy="4115151"/>
+            <a:chOff x="206448" y="2021951"/>
+            <a:chExt cx="11928402" cy="4115151"/>
           </a:xfrm>
         </p:grpSpPr>
         <p:pic>
@@ -16487,15 +16811,15 @@
                 </a:ext>
               </a:extLst>
             </a:blip>
-            <a:srcRect l="12653" r="5876" b="9517"/>
+            <a:srcRect l="12653" t="6045" r="5876" b="9517"/>
             <a:stretch>
               <a:fillRect/>
             </a:stretch>
           </p:blipFill>
           <p:spPr>
             <a:xfrm>
-              <a:off x="206448" y="1751841"/>
-              <a:ext cx="6051477" cy="4043504"/>
+              <a:off x="206448" y="2021951"/>
+              <a:ext cx="6051477" cy="3773393"/>
             </a:xfrm>
             <a:prstGeom prst="rect">
               <a:avLst/>
@@ -16524,15 +16848,15 @@
                 </a:ext>
               </a:extLst>
             </a:blip>
-            <a:srcRect l="12694" r="6789" b="1731"/>
+            <a:srcRect l="12694" t="7658" r="6789" b="1731"/>
             <a:stretch>
               <a:fillRect/>
             </a:stretch>
           </p:blipFill>
           <p:spPr>
             <a:xfrm>
-              <a:off x="6162675" y="1751840"/>
-              <a:ext cx="5972175" cy="4385262"/>
+              <a:off x="6162675" y="2093598"/>
+              <a:ext cx="5972175" cy="4043504"/>
             </a:xfrm>
             <a:prstGeom prst="rect">
               <a:avLst/>
@@ -16848,7 +17172,7 @@
         </p:nvSpPr>
         <p:spPr>
           <a:xfrm>
-            <a:off x="263598" y="5690295"/>
+            <a:off x="263598" y="5658765"/>
             <a:ext cx="11751499" cy="707886"/>
           </a:xfrm>
           <a:prstGeom prst="rect">
@@ -16867,7 +17191,7 @@
               <a:buChar char="•"/>
             </a:pPr>
             <a:r>
-              <a:rPr lang="it-IT" sz="2000" dirty="0">
+              <a:rPr lang="it-IT" sz="2000" b="1" dirty="0">
                 <a:latin typeface="Aptos" panose="020B0004020202020204" pitchFamily="34" charset="0"/>
               </a:rPr>
               <a:t>BRATS_140: </a:t>
@@ -16886,7 +17210,7 @@
               <a:buChar char="•"/>
             </a:pPr>
             <a:r>
-              <a:rPr lang="it-IT" sz="2000" dirty="0">
+              <a:rPr lang="it-IT" sz="2000" b="1" dirty="0">
                 <a:latin typeface="Aptos" panose="020B0004020202020204" pitchFamily="34" charset="0"/>
               </a:rPr>
               <a:t>BRATS_380: </a:t>
@@ -17219,8 +17543,8 @@
         </p:nvSpPr>
         <p:spPr>
           <a:xfrm>
-            <a:off x="590938" y="1533277"/>
-            <a:ext cx="10913706" cy="3539430"/>
+            <a:off x="609600" y="1644869"/>
+            <a:ext cx="9080938" cy="4401205"/>
           </a:xfrm>
           <a:prstGeom prst="rect">
             <a:avLst/>
@@ -17238,10 +17562,22 @@
               <a:buChar char="•"/>
             </a:pPr>
             <a:r>
+              <a:rPr lang="it-IT" sz="2800" b="1" dirty="0">
+                <a:latin typeface="Aptos" panose="020B0004020202020204" pitchFamily="34" charset="0"/>
+              </a:rPr>
+              <a:t>Fusion3</a:t>
+            </a:r>
+            <a:r>
               <a:rPr lang="it-IT" sz="2800" dirty="0">
                 <a:latin typeface="Aptos" panose="020B0004020202020204" pitchFamily="34" charset="0"/>
               </a:rPr>
-              <a:t>Sviluppata pipeline funzionante per segmentazione binaria del tumore cerebrale</a:t>
+              <a:t> è la configurazione con le </a:t>
+            </a:r>
+            <a:r>
+              <a:rPr lang="it-IT" sz="2800" b="1" dirty="0">
+                <a:latin typeface="Aptos" panose="020B0004020202020204" pitchFamily="34" charset="0"/>
+              </a:rPr>
+              <a:t>migliori prestazioni medie</a:t>
             </a:r>
           </a:p>
           <a:p>
@@ -17249,12 +17585,9 @@
               <a:buFont typeface="Arial" panose="020B0604020202020204" pitchFamily="34" charset="0"/>
               <a:buChar char="•"/>
             </a:pPr>
-            <a:r>
-              <a:rPr lang="it-IT" sz="2800" dirty="0">
-                <a:latin typeface="Aptos" panose="020B0004020202020204" pitchFamily="34" charset="0"/>
-              </a:rPr>
-              <a:t>Fusion3 è la configurazione con le migliori prestazioni medie</a:t>
-            </a:r>
+            <a:endParaRPr lang="it-IT" sz="2800" dirty="0">
+              <a:latin typeface="Aptos" panose="020B0004020202020204" pitchFamily="34" charset="0"/>
+            </a:endParaRPr>
           </a:p>
           <a:p>
             <a:pPr marL="514350" indent="-514350" algn="just">
@@ -17262,10 +17595,22 @@
               <a:buChar char="•"/>
             </a:pPr>
             <a:r>
+              <a:rPr lang="it-IT" sz="2800" b="1" dirty="0">
+                <a:latin typeface="Aptos" panose="020B0004020202020204" pitchFamily="34" charset="0"/>
+              </a:rPr>
+              <a:t>FLAIR </a:t>
+            </a:r>
+            <a:r>
               <a:rPr lang="it-IT" sz="2800" dirty="0">
                 <a:latin typeface="Aptos" panose="020B0004020202020204" pitchFamily="34" charset="0"/>
               </a:rPr>
-              <a:t>FLAIR risulta la sequenza singola più informativa</a:t>
+              <a:t>risulta </a:t>
+            </a:r>
+            <a:r>
+              <a:rPr lang="it-IT" sz="2800" b="1" dirty="0">
+                <a:latin typeface="Aptos" panose="020B0004020202020204" pitchFamily="34" charset="0"/>
+              </a:rPr>
+              <a:t>la sequenza singola più informativa</a:t>
             </a:r>
           </a:p>
           <a:p>
@@ -17273,12 +17618,9 @@
               <a:buFont typeface="Arial" panose="020B0604020202020204" pitchFamily="34" charset="0"/>
               <a:buChar char="•"/>
             </a:pPr>
-            <a:r>
-              <a:rPr lang="it-IT" sz="2800" dirty="0">
-                <a:latin typeface="Aptos" panose="020B0004020202020204" pitchFamily="34" charset="0"/>
-              </a:rPr>
-              <a:t>La multimodalità migliora la segmentazione, ma non garantisce robustezza in tutti i casi</a:t>
-            </a:r>
+            <a:endParaRPr lang="it-IT" sz="2800" dirty="0">
+              <a:latin typeface="Aptos" panose="020B0004020202020204" pitchFamily="34" charset="0"/>
+            </a:endParaRPr>
           </a:p>
           <a:p>
             <a:pPr marL="514350" indent="-514350" algn="just">
@@ -17289,11 +17631,133 @@
               <a:rPr lang="it-IT" sz="2800" dirty="0">
                 <a:latin typeface="Aptos" panose="020B0004020202020204" pitchFamily="34" charset="0"/>
               </a:rPr>
-              <a:t>Persistono casi critici che evidenziano i limiti dell’approccio 2D e delle tecniche tradizionali di Image Processing</a:t>
+              <a:t>La </a:t>
+            </a:r>
+            <a:r>
+              <a:rPr lang="it-IT" sz="2800" b="1" dirty="0">
+                <a:latin typeface="Aptos" panose="020B0004020202020204" pitchFamily="34" charset="0"/>
+              </a:rPr>
+              <a:t>multimodalità</a:t>
+            </a:r>
+            <a:r>
+              <a:rPr lang="it-IT" sz="2800" dirty="0">
+                <a:latin typeface="Aptos" panose="020B0004020202020204" pitchFamily="34" charset="0"/>
+              </a:rPr>
+              <a:t> </a:t>
+            </a:r>
+            <a:r>
+              <a:rPr lang="it-IT" sz="2800" b="1" dirty="0">
+                <a:latin typeface="Aptos" panose="020B0004020202020204" pitchFamily="34" charset="0"/>
+              </a:rPr>
+              <a:t>migliora</a:t>
+            </a:r>
+            <a:r>
+              <a:rPr lang="it-IT" sz="2800" dirty="0">
+                <a:latin typeface="Aptos" panose="020B0004020202020204" pitchFamily="34" charset="0"/>
+              </a:rPr>
+              <a:t> </a:t>
+            </a:r>
+            <a:r>
+              <a:rPr lang="it-IT" sz="2800" b="1" dirty="0">
+                <a:latin typeface="Aptos" panose="020B0004020202020204" pitchFamily="34" charset="0"/>
+              </a:rPr>
+              <a:t>la segmentazione</a:t>
+            </a:r>
+            <a:r>
+              <a:rPr lang="it-IT" sz="2800" dirty="0">
+                <a:latin typeface="Aptos" panose="020B0004020202020204" pitchFamily="34" charset="0"/>
+              </a:rPr>
+              <a:t>, ma non garantisce robustezza in tutti i casi</a:t>
+            </a:r>
+          </a:p>
+          <a:p>
+            <a:pPr marL="514350" indent="-514350" algn="just">
+              <a:buFont typeface="Arial" panose="020B0604020202020204" pitchFamily="34" charset="0"/>
+              <a:buChar char="•"/>
+            </a:pPr>
+            <a:endParaRPr lang="it-IT" sz="2800" dirty="0">
+              <a:latin typeface="Aptos" panose="020B0004020202020204" pitchFamily="34" charset="0"/>
+            </a:endParaRPr>
+          </a:p>
+          <a:p>
+            <a:pPr marL="514350" indent="-514350" algn="just">
+              <a:buFont typeface="Arial" panose="020B0604020202020204" pitchFamily="34" charset="0"/>
+              <a:buChar char="•"/>
+            </a:pPr>
+            <a:r>
+              <a:rPr lang="it-IT" sz="2800" b="1" dirty="0">
+                <a:latin typeface="Aptos" panose="020B0004020202020204" pitchFamily="34" charset="0"/>
+              </a:rPr>
+              <a:t>Casi critici </a:t>
+            </a:r>
+            <a:r>
+              <a:rPr lang="it-IT" sz="2800" dirty="0">
+                <a:latin typeface="Aptos" panose="020B0004020202020204" pitchFamily="34" charset="0"/>
+              </a:rPr>
+              <a:t>che evidenziano i </a:t>
+            </a:r>
+            <a:r>
+              <a:rPr lang="it-IT" sz="2800" b="1" dirty="0">
+                <a:latin typeface="Aptos" panose="020B0004020202020204" pitchFamily="34" charset="0"/>
+              </a:rPr>
+              <a:t>limiti dell’approccio 2D </a:t>
+            </a:r>
+            <a:r>
+              <a:rPr lang="it-IT" sz="2800" dirty="0">
+                <a:latin typeface="Aptos" panose="020B0004020202020204" pitchFamily="34" charset="0"/>
+              </a:rPr>
+              <a:t>e delle tecniche tradizionali di Image Processing</a:t>
             </a:r>
           </a:p>
         </p:txBody>
       </p:sp>
+      <p:pic>
+        <p:nvPicPr>
+          <p:cNvPr id="1028" name="Picture 4" descr="Exam Result PNGs for Free Download">
+            <a:extLst>
+              <a:ext uri="{FF2B5EF4-FFF2-40B4-BE49-F238E27FC236}">
+                <a16:creationId xmlns:a16="http://schemas.microsoft.com/office/drawing/2014/main" id="{6CB1B5BB-37DB-4251-4003-7A4FA0980632}"/>
+              </a:ext>
+            </a:extLst>
+          </p:cNvPr>
+          <p:cNvPicPr>
+            <a:picLocks noChangeAspect="1" noChangeArrowheads="1"/>
+          </p:cNvPicPr>
+          <p:nvPr/>
+        </p:nvPicPr>
+        <p:blipFill>
+          <a:blip r:embed="rId3">
+            <a:extLst>
+              <a:ext uri="{28A0092B-C50C-407E-A947-70E740481C1C}">
+                <a14:useLocalDpi xmlns:a14="http://schemas.microsoft.com/office/drawing/2010/main" val="0"/>
+              </a:ext>
+            </a:extLst>
+          </a:blip>
+          <a:srcRect/>
+          <a:stretch>
+            <a:fillRect/>
+          </a:stretch>
+        </p:blipFill>
+        <p:spPr bwMode="auto">
+          <a:xfrm>
+            <a:off x="9932275" y="2580445"/>
+            <a:ext cx="1865274" cy="1865274"/>
+          </a:xfrm>
+          <a:prstGeom prst="rect">
+            <a:avLst/>
+          </a:prstGeom>
+          <a:noFill/>
+          <a:extLst>
+            <a:ext uri="{909E8E84-426E-40DD-AFC4-6F175D3DCCD1}">
+              <a14:hiddenFill xmlns:a14="http://schemas.microsoft.com/office/drawing/2010/main">
+                <a:solidFill>
+                  <a:srgbClr val="FFFFFF"/>
+                </a:solidFill>
+              </a14:hiddenFill>
+            </a:ext>
+          </a:extLst>
+        </p:spPr>
+      </p:pic>
     </p:spTree>
     <p:extLst>
       <p:ext uri="{BB962C8B-B14F-4D97-AF65-F5344CB8AC3E}">
@@ -17612,8 +18076,8 @@
         </p:nvSpPr>
         <p:spPr>
           <a:xfrm>
-            <a:off x="609600" y="1586450"/>
-            <a:ext cx="10876384" cy="3108543"/>
+            <a:off x="672662" y="1396663"/>
+            <a:ext cx="10846676" cy="5262979"/>
           </a:xfrm>
           <a:prstGeom prst="rect">
             <a:avLst/>
@@ -17646,7 +18110,13 @@
               <a:rPr lang="it-IT" sz="2800" dirty="0">
                 <a:latin typeface="Aptos" panose="020B0004020202020204" pitchFamily="34" charset="0"/>
               </a:rPr>
-              <a:t>Estensione della pipeline da 2D a 3D</a:t>
+              <a:t>Estensione della pipeline </a:t>
+            </a:r>
+            <a:r>
+              <a:rPr lang="it-IT" sz="2800" b="1" dirty="0">
+                <a:latin typeface="Aptos" panose="020B0004020202020204" pitchFamily="34" charset="0"/>
+              </a:rPr>
+              <a:t>da 2D a 3D</a:t>
             </a:r>
           </a:p>
           <a:p>
@@ -17654,12 +18124,9 @@
               <a:buFont typeface="Arial" panose="020B0604020202020204" pitchFamily="34" charset="0"/>
               <a:buChar char="•"/>
             </a:pPr>
-            <a:r>
-              <a:rPr lang="it-IT" sz="2800" dirty="0">
-                <a:latin typeface="Aptos" panose="020B0004020202020204" pitchFamily="34" charset="0"/>
-              </a:rPr>
-              <a:t>Strategie di fusione multimodale più avanzate</a:t>
-            </a:r>
+            <a:endParaRPr lang="it-IT" sz="2800" dirty="0">
+              <a:latin typeface="Aptos" panose="020B0004020202020204" pitchFamily="34" charset="0"/>
+            </a:endParaRPr>
           </a:p>
           <a:p>
             <a:pPr marL="514350" indent="-514350" algn="just">
@@ -17667,17 +18134,20 @@
               <a:buChar char="•"/>
             </a:pPr>
             <a:r>
+              <a:rPr lang="it-IT" sz="2800" b="1" dirty="0">
+                <a:latin typeface="Aptos" panose="020B0004020202020204" pitchFamily="34" charset="0"/>
+              </a:rPr>
+              <a:t>Diverse strategie di fusione </a:t>
+            </a:r>
+            <a:r>
               <a:rPr lang="it-IT" sz="2800" dirty="0">
                 <a:latin typeface="Aptos" panose="020B0004020202020204" pitchFamily="34" charset="0"/>
               </a:rPr>
-              <a:t>Confronto con altri approcci classici, ad esempio K-Means e metodi Edge-</a:t>
-            </a:r>
-            <a:r>
-              <a:rPr lang="it-IT" sz="2800" dirty="0" err="1">
-                <a:latin typeface="Aptos" panose="020B0004020202020204" pitchFamily="34" charset="0"/>
-              </a:rPr>
-              <a:t>Based</a:t>
-            </a:r>
+              <a:t>multimodale più avanzate</a:t>
+            </a:r>
+          </a:p>
+          <a:p>
+            <a:pPr algn="just"/>
             <a:endParaRPr lang="it-IT" sz="2800" dirty="0">
               <a:latin typeface="Aptos" panose="020B0004020202020204" pitchFamily="34" charset="0"/>
             </a:endParaRPr>
@@ -17691,11 +18161,145 @@
               <a:rPr lang="it-IT" sz="2800" dirty="0">
                 <a:latin typeface="Aptos" panose="020B0004020202020204" pitchFamily="34" charset="0"/>
               </a:rPr>
-              <a:t>Integrazione e confronto con tecniche di Machine Learning/Deep Learning</a:t>
-            </a:r>
+              <a:t>Confronto con </a:t>
+            </a:r>
+            <a:r>
+              <a:rPr lang="it-IT" sz="2800" b="1" dirty="0">
+                <a:latin typeface="Aptos" panose="020B0004020202020204" pitchFamily="34" charset="0"/>
+              </a:rPr>
+              <a:t>altri</a:t>
+            </a:r>
+            <a:r>
+              <a:rPr lang="it-IT" sz="2800" dirty="0">
+                <a:latin typeface="Aptos" panose="020B0004020202020204" pitchFamily="34" charset="0"/>
+              </a:rPr>
+              <a:t> </a:t>
+            </a:r>
+            <a:r>
+              <a:rPr lang="it-IT" sz="2800" b="1" dirty="0">
+                <a:latin typeface="Aptos" panose="020B0004020202020204" pitchFamily="34" charset="0"/>
+              </a:rPr>
+              <a:t>approcci classici</a:t>
+            </a:r>
+            <a:r>
+              <a:rPr lang="it-IT" sz="2800" dirty="0">
+                <a:latin typeface="Aptos" panose="020B0004020202020204" pitchFamily="34" charset="0"/>
+              </a:rPr>
+              <a:t>, ad esempio K-Means e metodi Edge-</a:t>
+            </a:r>
+            <a:r>
+              <a:rPr lang="it-IT" sz="2800" dirty="0" err="1">
+                <a:latin typeface="Aptos" panose="020B0004020202020204" pitchFamily="34" charset="0"/>
+              </a:rPr>
+              <a:t>Based</a:t>
+            </a:r>
+            <a:endParaRPr lang="it-IT" sz="2800" dirty="0">
+              <a:latin typeface="Aptos" panose="020B0004020202020204" pitchFamily="34" charset="0"/>
+            </a:endParaRPr>
+          </a:p>
+          <a:p>
+            <a:pPr marL="514350" indent="-514350" algn="just">
+              <a:buFont typeface="Arial" panose="020B0604020202020204" pitchFamily="34" charset="0"/>
+              <a:buChar char="•"/>
+            </a:pPr>
+            <a:endParaRPr lang="it-IT" sz="2800" dirty="0">
+              <a:latin typeface="Aptos" panose="020B0004020202020204" pitchFamily="34" charset="0"/>
+            </a:endParaRPr>
+          </a:p>
+          <a:p>
+            <a:pPr marL="514350" indent="-514350" algn="just">
+              <a:buFont typeface="Arial" panose="020B0604020202020204" pitchFamily="34" charset="0"/>
+              <a:buChar char="•"/>
+            </a:pPr>
+            <a:r>
+              <a:rPr lang="it-IT" sz="2800" dirty="0">
+                <a:latin typeface="Aptos" panose="020B0004020202020204" pitchFamily="34" charset="0"/>
+              </a:rPr>
+              <a:t>Integrazione e confronto con</a:t>
+            </a:r>
+          </a:p>
+          <a:p>
+            <a:pPr algn="just"/>
+            <a:r>
+              <a:rPr lang="it-IT" sz="2800" dirty="0">
+                <a:latin typeface="Aptos" panose="020B0004020202020204" pitchFamily="34" charset="0"/>
+              </a:rPr>
+              <a:t>       tecniche di </a:t>
+            </a:r>
+            <a:r>
+              <a:rPr lang="it-IT" sz="2800" b="1" dirty="0">
+                <a:latin typeface="Aptos" panose="020B0004020202020204" pitchFamily="34" charset="0"/>
+              </a:rPr>
+              <a:t>Machine Learning e</a:t>
+            </a:r>
+          </a:p>
+          <a:p>
+            <a:pPr algn="just"/>
+            <a:r>
+              <a:rPr lang="it-IT" sz="2800" b="1" dirty="0">
+                <a:latin typeface="Aptos" panose="020B0004020202020204" pitchFamily="34" charset="0"/>
+              </a:rPr>
+              <a:t>       Deep Learning</a:t>
+            </a:r>
+          </a:p>
+          <a:p>
+            <a:pPr marL="514350" indent="-514350" algn="just">
+              <a:buFont typeface="Arial" panose="020B0604020202020204" pitchFamily="34" charset="0"/>
+              <a:buChar char="•"/>
+            </a:pPr>
+            <a:endParaRPr lang="it-IT" sz="2800" dirty="0">
+              <a:latin typeface="Aptos" panose="020B0004020202020204" pitchFamily="34" charset="0"/>
+            </a:endParaRPr>
           </a:p>
         </p:txBody>
       </p:sp>
+      <p:pic>
+        <p:nvPicPr>
+          <p:cNvPr id="2054" name="Picture 6">
+            <a:extLst>
+              <a:ext uri="{FF2B5EF4-FFF2-40B4-BE49-F238E27FC236}">
+                <a16:creationId xmlns:a16="http://schemas.microsoft.com/office/drawing/2014/main" id="{33E9C42F-2060-F6D4-4E58-648AC05A6F90}"/>
+              </a:ext>
+            </a:extLst>
+          </p:cNvPr>
+          <p:cNvPicPr>
+            <a:picLocks noChangeAspect="1" noChangeArrowheads="1"/>
+          </p:cNvPicPr>
+          <p:nvPr/>
+        </p:nvPicPr>
+        <p:blipFill>
+          <a:blip r:embed="rId3">
+            <a:extLst>
+              <a:ext uri="{28A0092B-C50C-407E-A947-70E740481C1C}">
+                <a14:useLocalDpi xmlns:a14="http://schemas.microsoft.com/office/drawing/2010/main" val="0"/>
+              </a:ext>
+            </a:extLst>
+          </a:blip>
+          <a:srcRect/>
+          <a:stretch>
+            <a:fillRect/>
+          </a:stretch>
+        </p:blipFill>
+        <p:spPr bwMode="auto">
+          <a:xfrm>
+            <a:off x="6479144" y="4395500"/>
+            <a:ext cx="5524827" cy="1699947"/>
+          </a:xfrm>
+          <a:prstGeom prst="rect">
+            <a:avLst/>
+          </a:prstGeom>
+          <a:noFill/>
+          <a:extLst>
+            <a:ext uri="{909E8E84-426E-40DD-AFC4-6F175D3DCCD1}">
+              <a14:hiddenFill xmlns:a14="http://schemas.microsoft.com/office/drawing/2010/main">
+                <a:solidFill>
+                  <a:srgbClr val="FFFFFF"/>
+                </a:solidFill>
+              </a14:hiddenFill>
+            </a:ext>
+          </a:extLst>
+        </p:spPr>
+      </p:pic>
     </p:spTree>
     <p:extLst>
       <p:ext uri="{BB962C8B-B14F-4D97-AF65-F5344CB8AC3E}">
@@ -21311,7 +21915,7 @@
         </p:blipFill>
         <p:spPr>
           <a:xfrm>
-            <a:off x="442708" y="1654802"/>
+            <a:off x="452723" y="1723382"/>
             <a:ext cx="11377312" cy="1378899"/>
           </a:xfrm>
           <a:prstGeom prst="rect">
@@ -21335,8 +21939,8 @@
         </p:nvSpPr>
         <p:spPr>
           <a:xfrm>
-            <a:off x="407343" y="3284968"/>
-            <a:ext cx="11412677" cy="2677656"/>
+            <a:off x="389661" y="3429000"/>
+            <a:ext cx="11412677" cy="2246769"/>
           </a:xfrm>
           <a:prstGeom prst="rect">
             <a:avLst/>
@@ -21387,7 +21991,7 @@
               <a:rPr lang="it-IT" sz="2800" dirty="0">
                 <a:latin typeface="Aptos" panose="020B0004020202020204" pitchFamily="34" charset="0"/>
               </a:rPr>
-              <a:t>preparazione di tutte le sequenze per segmentazione</a:t>
+              <a:t>preparazione delle sequenze per la segmentazione</a:t>
             </a:r>
           </a:p>
           <a:p>
@@ -21405,7 +22009,7 @@
               <a:rPr lang="it-IT" sz="2800" dirty="0">
                 <a:latin typeface="Aptos" panose="020B0004020202020204" pitchFamily="34" charset="0"/>
               </a:rPr>
-              <a:t>applicazione in cascata delle tecniche di Image Processing</a:t>
+              <a:t>tecniche di Image Processing in cascata</a:t>
             </a:r>
           </a:p>
           <a:p>
@@ -21462,7 +22066,7 @@
         </p:nvSpPr>
         <p:spPr>
           <a:xfrm>
-            <a:off x="8566518" y="5884355"/>
+            <a:off x="8366828" y="5915885"/>
             <a:ext cx="3474719" cy="400110"/>
           </a:xfrm>
           <a:prstGeom prst="rect">

--- a/deliverables/presentation.pptx
+++ b/deliverables/presentation.pptx
@@ -9384,422 +9384,6 @@
           <a:chExt cx="0" cy="0"/>
         </a:xfrm>
       </p:grpSpPr>
-      <p:sp>
-        <p:nvSpPr>
-          <p:cNvPr id="5" name="CasellaDiTesto 4">
-            <a:extLst>
-              <a:ext uri="{FF2B5EF4-FFF2-40B4-BE49-F238E27FC236}">
-                <a16:creationId xmlns:a16="http://schemas.microsoft.com/office/drawing/2014/main" id="{C431533D-7F47-64FA-D175-4ABA5491DBD8}"/>
-              </a:ext>
-            </a:extLst>
-          </p:cNvPr>
-          <p:cNvSpPr txBox="1"/>
-          <p:nvPr/>
-        </p:nvSpPr>
-        <p:spPr>
-          <a:xfrm>
-            <a:off x="609600" y="381000"/>
-            <a:ext cx="5505033" cy="1015663"/>
-          </a:xfrm>
-          <a:prstGeom prst="rect">
-            <a:avLst/>
-          </a:prstGeom>
-          <a:noFill/>
-        </p:spPr>
-        <p:txBody>
-          <a:bodyPr wrap="none" rtlCol="0">
-            <a:spAutoFit/>
-          </a:bodyPr>
-          <a:lstStyle/>
-          <a:p>
-            <a:r>
-              <a:rPr lang="it-IT" sz="6000" b="1" dirty="0" err="1">
-                <a:latin typeface="Aptos" panose="020B0004020202020204" pitchFamily="34" charset="0"/>
-              </a:rPr>
-              <a:t>Pre</a:t>
-            </a:r>
-            <a:r>
-              <a:rPr lang="it-IT" sz="6000" b="1" dirty="0">
-                <a:latin typeface="Aptos" panose="020B0004020202020204" pitchFamily="34" charset="0"/>
-              </a:rPr>
-              <a:t>-Processing</a:t>
-            </a:r>
-          </a:p>
-        </p:txBody>
-      </p:sp>
-      <p:grpSp>
-        <p:nvGrpSpPr>
-          <p:cNvPr id="4" name="object 9">
-            <a:extLst>
-              <a:ext uri="{FF2B5EF4-FFF2-40B4-BE49-F238E27FC236}">
-                <a16:creationId xmlns:a16="http://schemas.microsoft.com/office/drawing/2014/main" id="{520FE6E6-0683-91B4-EC05-44C97965C1D7}"/>
-              </a:ext>
-            </a:extLst>
-          </p:cNvPr>
-          <p:cNvGrpSpPr/>
-          <p:nvPr/>
-        </p:nvGrpSpPr>
-        <p:grpSpPr>
-          <a:xfrm>
-            <a:off x="-7209" y="6455826"/>
-            <a:ext cx="12211050" cy="403860"/>
-            <a:chOff x="-7209" y="6455826"/>
-            <a:chExt cx="12211050" cy="403860"/>
-          </a:xfrm>
-          <a:solidFill>
-            <a:srgbClr val="009999"/>
-          </a:solidFill>
-        </p:grpSpPr>
-        <p:sp>
-          <p:nvSpPr>
-            <p:cNvPr id="6" name="object 10">
-              <a:extLst>
-                <a:ext uri="{FF2B5EF4-FFF2-40B4-BE49-F238E27FC236}">
-                  <a16:creationId xmlns:a16="http://schemas.microsoft.com/office/drawing/2014/main" id="{A9003E5E-83C1-A89C-C864-AD89C965ECA7}"/>
-                </a:ext>
-              </a:extLst>
-            </p:cNvPr>
-            <p:cNvSpPr/>
-            <p:nvPr/>
-          </p:nvSpPr>
-          <p:spPr>
-            <a:xfrm>
-              <a:off x="2315" y="6465351"/>
-              <a:ext cx="12192000" cy="384810"/>
-            </a:xfrm>
-            <a:custGeom>
-              <a:avLst/>
-              <a:gdLst/>
-              <a:ahLst/>
-              <a:cxnLst/>
-              <a:rect l="l" t="t" r="r" b="b"/>
-              <a:pathLst>
-                <a:path w="12192000" h="384809">
-                  <a:moveTo>
-                    <a:pt x="12191619" y="0"/>
-                  </a:moveTo>
-                  <a:lnTo>
-                    <a:pt x="0" y="0"/>
-                  </a:lnTo>
-                  <a:lnTo>
-                    <a:pt x="0" y="384657"/>
-                  </a:lnTo>
-                  <a:lnTo>
-                    <a:pt x="12191619" y="384657"/>
-                  </a:lnTo>
-                  <a:lnTo>
-                    <a:pt x="12191619" y="0"/>
-                  </a:lnTo>
-                  <a:close/>
-                </a:path>
-              </a:pathLst>
-            </a:custGeom>
-            <a:grpFill/>
-          </p:spPr>
-          <p:txBody>
-            <a:bodyPr wrap="square" lIns="0" tIns="0" rIns="0" bIns="0" rtlCol="0"/>
-            <a:lstStyle/>
-            <a:p>
-              <a:endParaRPr/>
-            </a:p>
-          </p:txBody>
-        </p:sp>
-        <p:sp>
-          <p:nvSpPr>
-            <p:cNvPr id="11" name="object 11">
-              <a:extLst>
-                <a:ext uri="{FF2B5EF4-FFF2-40B4-BE49-F238E27FC236}">
-                  <a16:creationId xmlns:a16="http://schemas.microsoft.com/office/drawing/2014/main" id="{6F5DF6DE-DC27-C369-531F-E602755A5F83}"/>
-                </a:ext>
-              </a:extLst>
-            </p:cNvPr>
-            <p:cNvSpPr/>
-            <p:nvPr/>
-          </p:nvSpPr>
-          <p:spPr>
-            <a:xfrm>
-              <a:off x="2315" y="6465351"/>
-              <a:ext cx="12192000" cy="384810"/>
-            </a:xfrm>
-            <a:custGeom>
-              <a:avLst/>
-              <a:gdLst/>
-              <a:ahLst/>
-              <a:cxnLst/>
-              <a:rect l="l" t="t" r="r" b="b"/>
-              <a:pathLst>
-                <a:path w="12192000" h="384809">
-                  <a:moveTo>
-                    <a:pt x="0" y="384657"/>
-                  </a:moveTo>
-                  <a:lnTo>
-                    <a:pt x="12191619" y="384657"/>
-                  </a:lnTo>
-                  <a:lnTo>
-                    <a:pt x="12191619" y="0"/>
-                  </a:lnTo>
-                  <a:lnTo>
-                    <a:pt x="0" y="0"/>
-                  </a:lnTo>
-                  <a:lnTo>
-                    <a:pt x="0" y="384657"/>
-                  </a:lnTo>
-                  <a:close/>
-                </a:path>
-              </a:pathLst>
-            </a:custGeom>
-            <a:grpFill/>
-            <a:ln w="19050">
-              <a:solidFill>
-                <a:srgbClr val="009999"/>
-              </a:solidFill>
-            </a:ln>
-          </p:spPr>
-          <p:txBody>
-            <a:bodyPr wrap="square" lIns="0" tIns="0" rIns="0" bIns="0" rtlCol="0"/>
-            <a:lstStyle/>
-            <a:p>
-              <a:endParaRPr/>
-            </a:p>
-          </p:txBody>
-        </p:sp>
-      </p:grpSp>
-      <p:sp>
-        <p:nvSpPr>
-          <p:cNvPr id="13" name="CasellaDiTesto 12">
-            <a:extLst>
-              <a:ext uri="{FF2B5EF4-FFF2-40B4-BE49-F238E27FC236}">
-                <a16:creationId xmlns:a16="http://schemas.microsoft.com/office/drawing/2014/main" id="{C463AC43-A696-102C-37C7-6017A571871A}"/>
-              </a:ext>
-            </a:extLst>
-          </p:cNvPr>
-          <p:cNvSpPr txBox="1"/>
-          <p:nvPr/>
-        </p:nvSpPr>
-        <p:spPr>
-          <a:xfrm>
-            <a:off x="11671424" y="6480829"/>
-            <a:ext cx="431528" cy="369332"/>
-          </a:xfrm>
-          <a:prstGeom prst="rect">
-            <a:avLst/>
-          </a:prstGeom>
-          <a:noFill/>
-        </p:spPr>
-        <p:txBody>
-          <a:bodyPr wrap="none" rtlCol="0">
-            <a:spAutoFit/>
-          </a:bodyPr>
-          <a:lstStyle/>
-          <a:p>
-            <a:pPr algn="ctr"/>
-            <a:r>
-              <a:rPr lang="it-IT" dirty="0">
-                <a:solidFill>
-                  <a:schemeClr val="bg1"/>
-                </a:solidFill>
-                <a:latin typeface="Aptos" panose="020B0004020202020204" pitchFamily="34" charset="0"/>
-              </a:rPr>
-              <a:t>14</a:t>
-            </a:r>
-          </a:p>
-        </p:txBody>
-      </p:sp>
-      <p:sp>
-        <p:nvSpPr>
-          <p:cNvPr id="14" name="CasellaDiTesto 13">
-            <a:extLst>
-              <a:ext uri="{FF2B5EF4-FFF2-40B4-BE49-F238E27FC236}">
-                <a16:creationId xmlns:a16="http://schemas.microsoft.com/office/drawing/2014/main" id="{33424C19-ECB8-39A3-D6E0-5DC5B3B0F179}"/>
-              </a:ext>
-            </a:extLst>
-          </p:cNvPr>
-          <p:cNvSpPr txBox="1"/>
-          <p:nvPr/>
-        </p:nvSpPr>
-        <p:spPr>
-          <a:xfrm>
-            <a:off x="82177" y="6465351"/>
-            <a:ext cx="5281172" cy="369332"/>
-          </a:xfrm>
-          <a:prstGeom prst="rect">
-            <a:avLst/>
-          </a:prstGeom>
-          <a:noFill/>
-        </p:spPr>
-        <p:txBody>
-          <a:bodyPr wrap="square" rtlCol="0">
-            <a:spAutoFit/>
-          </a:bodyPr>
-          <a:lstStyle/>
-          <a:p>
-            <a:pPr algn="l"/>
-            <a:r>
-              <a:rPr lang="it-IT" dirty="0">
-                <a:solidFill>
-                  <a:schemeClr val="bg1"/>
-                </a:solidFill>
-                <a:latin typeface="Aptos" panose="020B0004020202020204" pitchFamily="34" charset="0"/>
-              </a:rPr>
-              <a:t>Segmentazione di Tumori Cerebrali in Immagini MRI</a:t>
-            </a:r>
-          </a:p>
-        </p:txBody>
-      </p:sp>
-      <p:sp>
-        <p:nvSpPr>
-          <p:cNvPr id="3" name="CasellaDiTesto 2">
-            <a:extLst>
-              <a:ext uri="{FF2B5EF4-FFF2-40B4-BE49-F238E27FC236}">
-                <a16:creationId xmlns:a16="http://schemas.microsoft.com/office/drawing/2014/main" id="{2FC5DB6B-DD9D-3F41-4069-3B890D8227DF}"/>
-              </a:ext>
-            </a:extLst>
-          </p:cNvPr>
-          <p:cNvSpPr txBox="1"/>
-          <p:nvPr/>
-        </p:nvSpPr>
-        <p:spPr>
-          <a:xfrm>
-            <a:off x="639873" y="1115967"/>
-            <a:ext cx="6109333" cy="523220"/>
-          </a:xfrm>
-          <a:prstGeom prst="rect">
-            <a:avLst/>
-          </a:prstGeom>
-          <a:noFill/>
-        </p:spPr>
-        <p:txBody>
-          <a:bodyPr wrap="square">
-            <a:spAutoFit/>
-          </a:bodyPr>
-          <a:lstStyle/>
-          <a:p>
-            <a:pPr algn="l"/>
-            <a:r>
-              <a:rPr lang="it-IT" sz="2800" b="1" dirty="0">
-                <a:latin typeface="Aptos" panose="020B0004020202020204" pitchFamily="34" charset="0"/>
-              </a:rPr>
-              <a:t>Es. FLAIR</a:t>
-            </a:r>
-            <a:endParaRPr lang="it-IT" sz="2800" dirty="0">
-              <a:latin typeface="Aptos" panose="020B0004020202020204" pitchFamily="34" charset="0"/>
-            </a:endParaRPr>
-          </a:p>
-        </p:txBody>
-      </p:sp>
-      <p:sp>
-        <p:nvSpPr>
-          <p:cNvPr id="9" name="CasellaDiTesto 8">
-            <a:extLst>
-              <a:ext uri="{FF2B5EF4-FFF2-40B4-BE49-F238E27FC236}">
-                <a16:creationId xmlns:a16="http://schemas.microsoft.com/office/drawing/2014/main" id="{1DE898A1-7D0F-09B6-F5B4-3F5766FD0867}"/>
-              </a:ext>
-            </a:extLst>
-          </p:cNvPr>
-          <p:cNvSpPr txBox="1"/>
-          <p:nvPr/>
-        </p:nvSpPr>
-        <p:spPr>
-          <a:xfrm>
-            <a:off x="609599" y="1974647"/>
-            <a:ext cx="5833241" cy="3970318"/>
-          </a:xfrm>
-          <a:prstGeom prst="rect">
-            <a:avLst/>
-          </a:prstGeom>
-          <a:noFill/>
-        </p:spPr>
-        <p:txBody>
-          <a:bodyPr wrap="square">
-            <a:spAutoFit/>
-          </a:bodyPr>
-          <a:lstStyle/>
-          <a:p>
-            <a:pPr algn="l"/>
-            <a:r>
-              <a:rPr lang="it-IT" sz="2800" b="1" dirty="0">
-                <a:latin typeface="Aptos" panose="020B0004020202020204" pitchFamily="34" charset="0"/>
-              </a:rPr>
-              <a:t>Filtro Mediano</a:t>
-            </a:r>
-          </a:p>
-          <a:p>
-            <a:pPr marL="457200" indent="-457200" algn="l">
-              <a:buFont typeface="Arial" panose="020B0604020202020204" pitchFamily="34" charset="0"/>
-              <a:buChar char="•"/>
-            </a:pPr>
-            <a:r>
-              <a:rPr lang="it-IT" sz="2800" b="1" dirty="0">
-                <a:latin typeface="Aptos" panose="020B0004020202020204" pitchFamily="34" charset="0"/>
-              </a:rPr>
-              <a:t>Obiettivo: </a:t>
-            </a:r>
-            <a:r>
-              <a:rPr lang="it-IT" sz="2800" dirty="0">
-                <a:latin typeface="Aptos" panose="020B0004020202020204" pitchFamily="34" charset="0"/>
-              </a:rPr>
-              <a:t>ridurre il rumore </a:t>
-            </a:r>
-            <a:r>
-              <a:rPr lang="it-IT" sz="2800" b="1" dirty="0">
-                <a:latin typeface="Aptos" panose="020B0004020202020204" pitchFamily="34" charset="0"/>
-              </a:rPr>
-              <a:t>preservando i contorni </a:t>
-            </a:r>
-            <a:r>
-              <a:rPr lang="it-IT" sz="2800" dirty="0">
-                <a:latin typeface="Aptos" panose="020B0004020202020204" pitchFamily="34" charset="0"/>
-              </a:rPr>
-              <a:t>principali della lesione.</a:t>
-            </a:r>
-          </a:p>
-          <a:p>
-            <a:pPr marL="457200" indent="-457200" algn="l">
-              <a:buFont typeface="Arial" panose="020B0604020202020204" pitchFamily="34" charset="0"/>
-              <a:buChar char="•"/>
-            </a:pPr>
-            <a:endParaRPr lang="it-IT" sz="2800" dirty="0">
-              <a:latin typeface="Aptos" panose="020B0004020202020204" pitchFamily="34" charset="0"/>
-            </a:endParaRPr>
-          </a:p>
-          <a:p>
-            <a:pPr marL="514350" indent="-514350" algn="l">
-              <a:buFont typeface="+mj-lt"/>
-              <a:buAutoNum type="arabicPeriod"/>
-            </a:pPr>
-            <a:r>
-              <a:rPr lang="it-IT" sz="2800" dirty="0">
-                <a:latin typeface="Aptos" panose="020B0004020202020204" pitchFamily="34" charset="0"/>
-              </a:rPr>
-              <a:t>Kernel 3 x 3</a:t>
-            </a:r>
-          </a:p>
-          <a:p>
-            <a:pPr marL="514350" indent="-514350" algn="l">
-              <a:buFont typeface="+mj-lt"/>
-              <a:buAutoNum type="arabicPeriod"/>
-            </a:pPr>
-            <a:r>
-              <a:rPr lang="it-IT" sz="2800" dirty="0">
-                <a:latin typeface="Aptos" panose="020B0004020202020204" pitchFamily="34" charset="0"/>
-              </a:rPr>
-              <a:t>Riduce il rumore impulsivo</a:t>
-            </a:r>
-          </a:p>
-          <a:p>
-            <a:pPr marL="514350" indent="-514350" algn="l">
-              <a:buFont typeface="+mj-lt"/>
-              <a:buAutoNum type="arabicPeriod"/>
-            </a:pPr>
-            <a:r>
-              <a:rPr lang="it-IT" sz="2800" dirty="0">
-                <a:latin typeface="Aptos" panose="020B0004020202020204" pitchFamily="34" charset="0"/>
-              </a:rPr>
-              <a:t>Non sfuma eccessivamente i bordi</a:t>
-            </a:r>
-          </a:p>
-        </p:txBody>
-      </p:sp>
       <p:grpSp>
         <p:nvGrpSpPr>
           <p:cNvPr id="16" name="Gruppo 15">
@@ -10213,6 +9797,422 @@
           </mc:Fallback>
         </mc:AlternateContent>
       </p:grpSp>
+      <p:sp>
+        <p:nvSpPr>
+          <p:cNvPr id="5" name="CasellaDiTesto 4">
+            <a:extLst>
+              <a:ext uri="{FF2B5EF4-FFF2-40B4-BE49-F238E27FC236}">
+                <a16:creationId xmlns:a16="http://schemas.microsoft.com/office/drawing/2014/main" id="{C431533D-7F47-64FA-D175-4ABA5491DBD8}"/>
+              </a:ext>
+            </a:extLst>
+          </p:cNvPr>
+          <p:cNvSpPr txBox="1"/>
+          <p:nvPr/>
+        </p:nvSpPr>
+        <p:spPr>
+          <a:xfrm>
+            <a:off x="609600" y="381000"/>
+            <a:ext cx="5505033" cy="1015663"/>
+          </a:xfrm>
+          <a:prstGeom prst="rect">
+            <a:avLst/>
+          </a:prstGeom>
+          <a:noFill/>
+        </p:spPr>
+        <p:txBody>
+          <a:bodyPr wrap="none" rtlCol="0">
+            <a:spAutoFit/>
+          </a:bodyPr>
+          <a:lstStyle/>
+          <a:p>
+            <a:r>
+              <a:rPr lang="it-IT" sz="6000" b="1" dirty="0" err="1">
+                <a:latin typeface="Aptos" panose="020B0004020202020204" pitchFamily="34" charset="0"/>
+              </a:rPr>
+              <a:t>Pre</a:t>
+            </a:r>
+            <a:r>
+              <a:rPr lang="it-IT" sz="6000" b="1" dirty="0">
+                <a:latin typeface="Aptos" panose="020B0004020202020204" pitchFamily="34" charset="0"/>
+              </a:rPr>
+              <a:t>-Processing</a:t>
+            </a:r>
+          </a:p>
+        </p:txBody>
+      </p:sp>
+      <p:grpSp>
+        <p:nvGrpSpPr>
+          <p:cNvPr id="4" name="object 9">
+            <a:extLst>
+              <a:ext uri="{FF2B5EF4-FFF2-40B4-BE49-F238E27FC236}">
+                <a16:creationId xmlns:a16="http://schemas.microsoft.com/office/drawing/2014/main" id="{520FE6E6-0683-91B4-EC05-44C97965C1D7}"/>
+              </a:ext>
+            </a:extLst>
+          </p:cNvPr>
+          <p:cNvGrpSpPr/>
+          <p:nvPr/>
+        </p:nvGrpSpPr>
+        <p:grpSpPr>
+          <a:xfrm>
+            <a:off x="-7209" y="6455826"/>
+            <a:ext cx="12211050" cy="403860"/>
+            <a:chOff x="-7209" y="6455826"/>
+            <a:chExt cx="12211050" cy="403860"/>
+          </a:xfrm>
+          <a:solidFill>
+            <a:srgbClr val="009999"/>
+          </a:solidFill>
+        </p:grpSpPr>
+        <p:sp>
+          <p:nvSpPr>
+            <p:cNvPr id="6" name="object 10">
+              <a:extLst>
+                <a:ext uri="{FF2B5EF4-FFF2-40B4-BE49-F238E27FC236}">
+                  <a16:creationId xmlns:a16="http://schemas.microsoft.com/office/drawing/2014/main" id="{A9003E5E-83C1-A89C-C864-AD89C965ECA7}"/>
+                </a:ext>
+              </a:extLst>
+            </p:cNvPr>
+            <p:cNvSpPr/>
+            <p:nvPr/>
+          </p:nvSpPr>
+          <p:spPr>
+            <a:xfrm>
+              <a:off x="2315" y="6465351"/>
+              <a:ext cx="12192000" cy="384810"/>
+            </a:xfrm>
+            <a:custGeom>
+              <a:avLst/>
+              <a:gdLst/>
+              <a:ahLst/>
+              <a:cxnLst/>
+              <a:rect l="l" t="t" r="r" b="b"/>
+              <a:pathLst>
+                <a:path w="12192000" h="384809">
+                  <a:moveTo>
+                    <a:pt x="12191619" y="0"/>
+                  </a:moveTo>
+                  <a:lnTo>
+                    <a:pt x="0" y="0"/>
+                  </a:lnTo>
+                  <a:lnTo>
+                    <a:pt x="0" y="384657"/>
+                  </a:lnTo>
+                  <a:lnTo>
+                    <a:pt x="12191619" y="384657"/>
+                  </a:lnTo>
+                  <a:lnTo>
+                    <a:pt x="12191619" y="0"/>
+                  </a:lnTo>
+                  <a:close/>
+                </a:path>
+              </a:pathLst>
+            </a:custGeom>
+            <a:grpFill/>
+          </p:spPr>
+          <p:txBody>
+            <a:bodyPr wrap="square" lIns="0" tIns="0" rIns="0" bIns="0" rtlCol="0"/>
+            <a:lstStyle/>
+            <a:p>
+              <a:endParaRPr/>
+            </a:p>
+          </p:txBody>
+        </p:sp>
+        <p:sp>
+          <p:nvSpPr>
+            <p:cNvPr id="11" name="object 11">
+              <a:extLst>
+                <a:ext uri="{FF2B5EF4-FFF2-40B4-BE49-F238E27FC236}">
+                  <a16:creationId xmlns:a16="http://schemas.microsoft.com/office/drawing/2014/main" id="{6F5DF6DE-DC27-C369-531F-E602755A5F83}"/>
+                </a:ext>
+              </a:extLst>
+            </p:cNvPr>
+            <p:cNvSpPr/>
+            <p:nvPr/>
+          </p:nvSpPr>
+          <p:spPr>
+            <a:xfrm>
+              <a:off x="2315" y="6465351"/>
+              <a:ext cx="12192000" cy="384810"/>
+            </a:xfrm>
+            <a:custGeom>
+              <a:avLst/>
+              <a:gdLst/>
+              <a:ahLst/>
+              <a:cxnLst/>
+              <a:rect l="l" t="t" r="r" b="b"/>
+              <a:pathLst>
+                <a:path w="12192000" h="384809">
+                  <a:moveTo>
+                    <a:pt x="0" y="384657"/>
+                  </a:moveTo>
+                  <a:lnTo>
+                    <a:pt x="12191619" y="384657"/>
+                  </a:lnTo>
+                  <a:lnTo>
+                    <a:pt x="12191619" y="0"/>
+                  </a:lnTo>
+                  <a:lnTo>
+                    <a:pt x="0" y="0"/>
+                  </a:lnTo>
+                  <a:lnTo>
+                    <a:pt x="0" y="384657"/>
+                  </a:lnTo>
+                  <a:close/>
+                </a:path>
+              </a:pathLst>
+            </a:custGeom>
+            <a:grpFill/>
+            <a:ln w="19050">
+              <a:solidFill>
+                <a:srgbClr val="009999"/>
+              </a:solidFill>
+            </a:ln>
+          </p:spPr>
+          <p:txBody>
+            <a:bodyPr wrap="square" lIns="0" tIns="0" rIns="0" bIns="0" rtlCol="0"/>
+            <a:lstStyle/>
+            <a:p>
+              <a:endParaRPr/>
+            </a:p>
+          </p:txBody>
+        </p:sp>
+      </p:grpSp>
+      <p:sp>
+        <p:nvSpPr>
+          <p:cNvPr id="13" name="CasellaDiTesto 12">
+            <a:extLst>
+              <a:ext uri="{FF2B5EF4-FFF2-40B4-BE49-F238E27FC236}">
+                <a16:creationId xmlns:a16="http://schemas.microsoft.com/office/drawing/2014/main" id="{C463AC43-A696-102C-37C7-6017A571871A}"/>
+              </a:ext>
+            </a:extLst>
+          </p:cNvPr>
+          <p:cNvSpPr txBox="1"/>
+          <p:nvPr/>
+        </p:nvSpPr>
+        <p:spPr>
+          <a:xfrm>
+            <a:off x="11671424" y="6480829"/>
+            <a:ext cx="431528" cy="369332"/>
+          </a:xfrm>
+          <a:prstGeom prst="rect">
+            <a:avLst/>
+          </a:prstGeom>
+          <a:noFill/>
+        </p:spPr>
+        <p:txBody>
+          <a:bodyPr wrap="none" rtlCol="0">
+            <a:spAutoFit/>
+          </a:bodyPr>
+          <a:lstStyle/>
+          <a:p>
+            <a:pPr algn="ctr"/>
+            <a:r>
+              <a:rPr lang="it-IT" dirty="0">
+                <a:solidFill>
+                  <a:schemeClr val="bg1"/>
+                </a:solidFill>
+                <a:latin typeface="Aptos" panose="020B0004020202020204" pitchFamily="34" charset="0"/>
+              </a:rPr>
+              <a:t>14</a:t>
+            </a:r>
+          </a:p>
+        </p:txBody>
+      </p:sp>
+      <p:sp>
+        <p:nvSpPr>
+          <p:cNvPr id="14" name="CasellaDiTesto 13">
+            <a:extLst>
+              <a:ext uri="{FF2B5EF4-FFF2-40B4-BE49-F238E27FC236}">
+                <a16:creationId xmlns:a16="http://schemas.microsoft.com/office/drawing/2014/main" id="{33424C19-ECB8-39A3-D6E0-5DC5B3B0F179}"/>
+              </a:ext>
+            </a:extLst>
+          </p:cNvPr>
+          <p:cNvSpPr txBox="1"/>
+          <p:nvPr/>
+        </p:nvSpPr>
+        <p:spPr>
+          <a:xfrm>
+            <a:off x="82177" y="6465351"/>
+            <a:ext cx="5281172" cy="369332"/>
+          </a:xfrm>
+          <a:prstGeom prst="rect">
+            <a:avLst/>
+          </a:prstGeom>
+          <a:noFill/>
+        </p:spPr>
+        <p:txBody>
+          <a:bodyPr wrap="square" rtlCol="0">
+            <a:spAutoFit/>
+          </a:bodyPr>
+          <a:lstStyle/>
+          <a:p>
+            <a:pPr algn="l"/>
+            <a:r>
+              <a:rPr lang="it-IT" dirty="0">
+                <a:solidFill>
+                  <a:schemeClr val="bg1"/>
+                </a:solidFill>
+                <a:latin typeface="Aptos" panose="020B0004020202020204" pitchFamily="34" charset="0"/>
+              </a:rPr>
+              <a:t>Segmentazione di Tumori Cerebrali in Immagini MRI</a:t>
+            </a:r>
+          </a:p>
+        </p:txBody>
+      </p:sp>
+      <p:sp>
+        <p:nvSpPr>
+          <p:cNvPr id="3" name="CasellaDiTesto 2">
+            <a:extLst>
+              <a:ext uri="{FF2B5EF4-FFF2-40B4-BE49-F238E27FC236}">
+                <a16:creationId xmlns:a16="http://schemas.microsoft.com/office/drawing/2014/main" id="{2FC5DB6B-DD9D-3F41-4069-3B890D8227DF}"/>
+              </a:ext>
+            </a:extLst>
+          </p:cNvPr>
+          <p:cNvSpPr txBox="1"/>
+          <p:nvPr/>
+        </p:nvSpPr>
+        <p:spPr>
+          <a:xfrm>
+            <a:off x="639873" y="1115967"/>
+            <a:ext cx="6109333" cy="523220"/>
+          </a:xfrm>
+          <a:prstGeom prst="rect">
+            <a:avLst/>
+          </a:prstGeom>
+          <a:noFill/>
+        </p:spPr>
+        <p:txBody>
+          <a:bodyPr wrap="square">
+            <a:spAutoFit/>
+          </a:bodyPr>
+          <a:lstStyle/>
+          <a:p>
+            <a:pPr algn="l"/>
+            <a:r>
+              <a:rPr lang="it-IT" sz="2800" b="1" dirty="0">
+                <a:latin typeface="Aptos" panose="020B0004020202020204" pitchFamily="34" charset="0"/>
+              </a:rPr>
+              <a:t>Es. FLAIR</a:t>
+            </a:r>
+            <a:endParaRPr lang="it-IT" sz="2800" dirty="0">
+              <a:latin typeface="Aptos" panose="020B0004020202020204" pitchFamily="34" charset="0"/>
+            </a:endParaRPr>
+          </a:p>
+        </p:txBody>
+      </p:sp>
+      <p:sp>
+        <p:nvSpPr>
+          <p:cNvPr id="9" name="CasellaDiTesto 8">
+            <a:extLst>
+              <a:ext uri="{FF2B5EF4-FFF2-40B4-BE49-F238E27FC236}">
+                <a16:creationId xmlns:a16="http://schemas.microsoft.com/office/drawing/2014/main" id="{1DE898A1-7D0F-09B6-F5B4-3F5766FD0867}"/>
+              </a:ext>
+            </a:extLst>
+          </p:cNvPr>
+          <p:cNvSpPr txBox="1"/>
+          <p:nvPr/>
+        </p:nvSpPr>
+        <p:spPr>
+          <a:xfrm>
+            <a:off x="609599" y="1974647"/>
+            <a:ext cx="5833241" cy="3970318"/>
+          </a:xfrm>
+          <a:prstGeom prst="rect">
+            <a:avLst/>
+          </a:prstGeom>
+          <a:noFill/>
+        </p:spPr>
+        <p:txBody>
+          <a:bodyPr wrap="square">
+            <a:spAutoFit/>
+          </a:bodyPr>
+          <a:lstStyle/>
+          <a:p>
+            <a:pPr algn="l"/>
+            <a:r>
+              <a:rPr lang="it-IT" sz="2800" b="1" dirty="0">
+                <a:latin typeface="Aptos" panose="020B0004020202020204" pitchFamily="34" charset="0"/>
+              </a:rPr>
+              <a:t>Filtro Mediano</a:t>
+            </a:r>
+          </a:p>
+          <a:p>
+            <a:pPr marL="457200" indent="-457200" algn="l">
+              <a:buFont typeface="Arial" panose="020B0604020202020204" pitchFamily="34" charset="0"/>
+              <a:buChar char="•"/>
+            </a:pPr>
+            <a:r>
+              <a:rPr lang="it-IT" sz="2800" b="1" dirty="0">
+                <a:latin typeface="Aptos" panose="020B0004020202020204" pitchFamily="34" charset="0"/>
+              </a:rPr>
+              <a:t>Obiettivo: </a:t>
+            </a:r>
+            <a:r>
+              <a:rPr lang="it-IT" sz="2800" dirty="0">
+                <a:latin typeface="Aptos" panose="020B0004020202020204" pitchFamily="34" charset="0"/>
+              </a:rPr>
+              <a:t>ridurre il rumore </a:t>
+            </a:r>
+            <a:r>
+              <a:rPr lang="it-IT" sz="2800" b="1" dirty="0">
+                <a:latin typeface="Aptos" panose="020B0004020202020204" pitchFamily="34" charset="0"/>
+              </a:rPr>
+              <a:t>preservando i contorni </a:t>
+            </a:r>
+            <a:r>
+              <a:rPr lang="it-IT" sz="2800" dirty="0">
+                <a:latin typeface="Aptos" panose="020B0004020202020204" pitchFamily="34" charset="0"/>
+              </a:rPr>
+              <a:t>principali della lesione.</a:t>
+            </a:r>
+          </a:p>
+          <a:p>
+            <a:pPr marL="457200" indent="-457200" algn="l">
+              <a:buFont typeface="Arial" panose="020B0604020202020204" pitchFamily="34" charset="0"/>
+              <a:buChar char="•"/>
+            </a:pPr>
+            <a:endParaRPr lang="it-IT" sz="2800" dirty="0">
+              <a:latin typeface="Aptos" panose="020B0004020202020204" pitchFamily="34" charset="0"/>
+            </a:endParaRPr>
+          </a:p>
+          <a:p>
+            <a:pPr marL="514350" indent="-514350" algn="l">
+              <a:buFont typeface="+mj-lt"/>
+              <a:buAutoNum type="arabicPeriod"/>
+            </a:pPr>
+            <a:r>
+              <a:rPr lang="it-IT" sz="2800" dirty="0">
+                <a:latin typeface="Aptos" panose="020B0004020202020204" pitchFamily="34" charset="0"/>
+              </a:rPr>
+              <a:t>Kernel 3 x 3</a:t>
+            </a:r>
+          </a:p>
+          <a:p>
+            <a:pPr marL="514350" indent="-514350" algn="l">
+              <a:buFont typeface="+mj-lt"/>
+              <a:buAutoNum type="arabicPeriod"/>
+            </a:pPr>
+            <a:r>
+              <a:rPr lang="it-IT" sz="2800" dirty="0">
+                <a:latin typeface="Aptos" panose="020B0004020202020204" pitchFamily="34" charset="0"/>
+              </a:rPr>
+              <a:t>Riduce il rumore impulsivo</a:t>
+            </a:r>
+          </a:p>
+          <a:p>
+            <a:pPr marL="514350" indent="-514350" algn="l">
+              <a:buFont typeface="+mj-lt"/>
+              <a:buAutoNum type="arabicPeriod"/>
+            </a:pPr>
+            <a:r>
+              <a:rPr lang="it-IT" sz="2800" dirty="0">
+                <a:latin typeface="Aptos" panose="020B0004020202020204" pitchFamily="34" charset="0"/>
+              </a:rPr>
+              <a:t>Non sfuma eccessivamente i bordi</a:t>
+            </a:r>
+          </a:p>
+        </p:txBody>
+      </p:sp>
     </p:spTree>
     <p:extLst>
       <p:ext uri="{BB962C8B-B14F-4D97-AF65-F5344CB8AC3E}">

--- a/deliverables/presentation.pptx
+++ b/deliverables/presentation.pptx
@@ -8013,8 +8013,8 @@
         </p:nvSpPr>
         <p:spPr>
           <a:xfrm>
-            <a:off x="628650" y="1584752"/>
-            <a:ext cx="6286500" cy="3970318"/>
+            <a:off x="628649" y="1584752"/>
+            <a:ext cx="6331988" cy="4401205"/>
           </a:xfrm>
           <a:prstGeom prst="rect">
             <a:avLst/>
@@ -8027,7 +8027,7 @@
           </a:bodyPr>
           <a:lstStyle/>
           <a:p>
-            <a:pPr algn="l"/>
+            <a:pPr algn="just"/>
             <a:r>
               <a:rPr lang="it-IT" sz="2800" b="1" dirty="0" err="1">
                 <a:latin typeface="Aptos" panose="020B0004020202020204" pitchFamily="34" charset="0"/>
@@ -8051,7 +8051,7 @@
             </a:endParaRPr>
           </a:p>
           <a:p>
-            <a:pPr marL="457200" indent="-457200" algn="l">
+            <a:pPr marL="457200" indent="-457200" algn="just">
               <a:buFont typeface="Arial" panose="020B0604020202020204" pitchFamily="34" charset="0"/>
               <a:buChar char="•"/>
             </a:pPr>
@@ -8102,13 +8102,13 @@
             </a:endParaRPr>
           </a:p>
           <a:p>
-            <a:pPr algn="l"/>
+            <a:pPr algn="just"/>
             <a:endParaRPr lang="it-IT" sz="2800" dirty="0">
               <a:latin typeface="Aptos" panose="020B0004020202020204" pitchFamily="34" charset="0"/>
             </a:endParaRPr>
           </a:p>
           <a:p>
-            <a:pPr marL="514350" indent="-514350" algn="l">
+            <a:pPr marL="514350" indent="-514350" algn="just">
               <a:buFont typeface="+mj-lt"/>
               <a:buAutoNum type="arabicPeriod"/>
             </a:pPr>
@@ -8126,7 +8126,7 @@
             </a:r>
           </a:p>
           <a:p>
-            <a:pPr marL="514350" indent="-514350" algn="l">
+            <a:pPr marL="514350" indent="-514350" algn="just">
               <a:buFont typeface="+mj-lt"/>
               <a:buAutoNum type="arabicPeriod"/>
             </a:pPr>
@@ -8146,14 +8146,29 @@
               <a:rPr lang="it-IT" sz="2800" b="1" dirty="0">
                 <a:latin typeface="Aptos" panose="020B0004020202020204" pitchFamily="34" charset="0"/>
               </a:rPr>
-              <a:t>filtro gaussiano </a:t>
-            </a:r>
+              <a:t>filtro gaussiano</a:t>
+            </a:r>
+          </a:p>
+          <a:p>
+            <a:pPr marL="514350" indent="-514350" algn="just">
+              <a:buFont typeface="+mj-lt"/>
+              <a:buAutoNum type="arabicPeriod"/>
+            </a:pPr>
             <a:r>
               <a:rPr lang="it-IT" sz="2800" dirty="0">
                 <a:latin typeface="Aptos" panose="020B0004020202020204" pitchFamily="34" charset="0"/>
               </a:rPr>
-              <a:t>(σ = 3 scelto sperimentalmente)</a:t>
-            </a:r>
+              <a:t>Seme come coordinate del </a:t>
+            </a:r>
+            <a:r>
+              <a:rPr lang="it-IT" sz="2800" b="1" dirty="0">
+                <a:latin typeface="Aptos" panose="020B0004020202020204" pitchFamily="34" charset="0"/>
+              </a:rPr>
+              <a:t>pixel più intenso</a:t>
+            </a:r>
+            <a:endParaRPr lang="it-IT" sz="2800" dirty="0">
+              <a:latin typeface="Aptos" panose="020B0004020202020204" pitchFamily="34" charset="0"/>
+            </a:endParaRPr>
           </a:p>
         </p:txBody>
       </p:sp>
@@ -9637,6 +9652,145 @@
           <a:chExt cx="0" cy="0"/>
         </a:xfrm>
       </p:grpSpPr>
+      <p:grpSp>
+        <p:nvGrpSpPr>
+          <p:cNvPr id="9" name="Gruppo 8">
+            <a:extLst>
+              <a:ext uri="{FF2B5EF4-FFF2-40B4-BE49-F238E27FC236}">
+                <a16:creationId xmlns:a16="http://schemas.microsoft.com/office/drawing/2014/main" id="{3D49715C-E534-CD43-024C-A2229E355DDA}"/>
+              </a:ext>
+            </a:extLst>
+          </p:cNvPr>
+          <p:cNvGrpSpPr/>
+          <p:nvPr/>
+        </p:nvGrpSpPr>
+        <p:grpSpPr>
+          <a:xfrm>
+            <a:off x="8270324" y="1274011"/>
+            <a:ext cx="3698228" cy="4688913"/>
+            <a:chOff x="8269978" y="1504154"/>
+            <a:chExt cx="3698228" cy="4688913"/>
+          </a:xfrm>
+        </p:grpSpPr>
+        <p:pic>
+          <p:nvPicPr>
+            <p:cNvPr id="7" name="Immagine 6">
+              <a:extLst>
+                <a:ext uri="{FF2B5EF4-FFF2-40B4-BE49-F238E27FC236}">
+                  <a16:creationId xmlns:a16="http://schemas.microsoft.com/office/drawing/2014/main" id="{D0614128-731B-81BB-76DA-BCC33D46DC30}"/>
+                </a:ext>
+              </a:extLst>
+            </p:cNvPr>
+            <p:cNvPicPr>
+              <a:picLocks noChangeAspect="1"/>
+            </p:cNvPicPr>
+            <p:nvPr/>
+          </p:nvPicPr>
+          <p:blipFill>
+            <a:blip r:embed="rId3">
+              <a:extLst>
+                <a:ext uri="{28A0092B-C50C-407E-A947-70E740481C1C}">
+                  <a14:useLocalDpi xmlns:a14="http://schemas.microsoft.com/office/drawing/2010/main" val="0"/>
+                </a:ext>
+              </a:extLst>
+            </a:blip>
+            <a:srcRect l="18848" t="52166" r="58950" b="7195"/>
+            <a:stretch>
+              <a:fillRect/>
+            </a:stretch>
+          </p:blipFill>
+          <p:spPr>
+            <a:xfrm>
+              <a:off x="8269978" y="1504154"/>
+              <a:ext cx="3698228" cy="4072650"/>
+            </a:xfrm>
+            <a:prstGeom prst="rect">
+              <a:avLst/>
+            </a:prstGeom>
+          </p:spPr>
+        </p:pic>
+        <p:grpSp>
+          <p:nvGrpSpPr>
+            <p:cNvPr id="21" name="Gruppo 20">
+              <a:extLst>
+                <a:ext uri="{FF2B5EF4-FFF2-40B4-BE49-F238E27FC236}">
+                  <a16:creationId xmlns:a16="http://schemas.microsoft.com/office/drawing/2014/main" id="{6106C42C-6376-7C2A-E923-D74FB33D5EBC}"/>
+                </a:ext>
+              </a:extLst>
+            </p:cNvPr>
+            <p:cNvGrpSpPr/>
+            <p:nvPr/>
+          </p:nvGrpSpPr>
+          <p:grpSpPr>
+            <a:xfrm>
+              <a:off x="8269978" y="5401562"/>
+              <a:ext cx="3505201" cy="791505"/>
+              <a:chOff x="8029389" y="5543751"/>
+              <a:chExt cx="3505201" cy="791505"/>
+            </a:xfrm>
+          </p:grpSpPr>
+          <p:pic>
+            <p:nvPicPr>
+              <p:cNvPr id="20" name="Immagine 19">
+                <a:extLst>
+                  <a:ext uri="{FF2B5EF4-FFF2-40B4-BE49-F238E27FC236}">
+                    <a16:creationId xmlns:a16="http://schemas.microsoft.com/office/drawing/2014/main" id="{36C47B99-A44B-0EC6-EA6F-BEB981160C84}"/>
+                  </a:ext>
+                </a:extLst>
+              </p:cNvPr>
+              <p:cNvPicPr>
+                <a:picLocks noChangeAspect="1"/>
+              </p:cNvPicPr>
+              <p:nvPr/>
+            </p:nvPicPr>
+            <p:blipFill>
+              <a:blip r:embed="rId4"/>
+              <a:stretch>
+                <a:fillRect/>
+              </a:stretch>
+            </p:blipFill>
+            <p:spPr>
+              <a:xfrm>
+                <a:off x="8029389" y="5897106"/>
+                <a:ext cx="3505201" cy="438150"/>
+              </a:xfrm>
+              <a:prstGeom prst="rect">
+                <a:avLst/>
+              </a:prstGeom>
+            </p:spPr>
+          </p:pic>
+          <p:pic>
+            <p:nvPicPr>
+              <p:cNvPr id="17" name="Immagine 16">
+                <a:extLst>
+                  <a:ext uri="{FF2B5EF4-FFF2-40B4-BE49-F238E27FC236}">
+                    <a16:creationId xmlns:a16="http://schemas.microsoft.com/office/drawing/2014/main" id="{E19DF399-A1E8-DD2F-69C4-4788FDABF79F}"/>
+                  </a:ext>
+                </a:extLst>
+              </p:cNvPr>
+              <p:cNvPicPr>
+                <a:picLocks noChangeAspect="1"/>
+              </p:cNvPicPr>
+              <p:nvPr/>
+            </p:nvPicPr>
+            <p:blipFill>
+              <a:blip r:embed="rId5"/>
+              <a:stretch>
+                <a:fillRect/>
+              </a:stretch>
+            </p:blipFill>
+            <p:spPr>
+              <a:xfrm>
+                <a:off x="8477024" y="5543751"/>
+                <a:ext cx="2613522" cy="438150"/>
+              </a:xfrm>
+              <a:prstGeom prst="rect">
+                <a:avLst/>
+              </a:prstGeom>
+            </p:spPr>
+          </p:pic>
+        </p:grpSp>
+      </p:grpSp>
       <p:sp>
         <p:nvSpPr>
           <p:cNvPr id="5" name="CasellaDiTesto 4">
@@ -10107,145 +10261,6 @@
           </a:p>
         </p:txBody>
       </p:sp>
-      <p:grpSp>
-        <p:nvGrpSpPr>
-          <p:cNvPr id="22" name="Gruppo 21">
-            <a:extLst>
-              <a:ext uri="{FF2B5EF4-FFF2-40B4-BE49-F238E27FC236}">
-                <a16:creationId xmlns:a16="http://schemas.microsoft.com/office/drawing/2014/main" id="{B8CDAF70-E3EA-B9F0-5DE3-3A6A03C13FCA}"/>
-              </a:ext>
-            </a:extLst>
-          </p:cNvPr>
-          <p:cNvGrpSpPr/>
-          <p:nvPr/>
-        </p:nvGrpSpPr>
-        <p:grpSpPr>
-          <a:xfrm>
-            <a:off x="8174601" y="1677287"/>
-            <a:ext cx="3600578" cy="4515780"/>
-            <a:chOff x="7839203" y="1724912"/>
-            <a:chExt cx="3600578" cy="4515780"/>
-          </a:xfrm>
-        </p:grpSpPr>
-        <p:pic>
-          <p:nvPicPr>
-            <p:cNvPr id="8" name="Immagine 7">
-              <a:extLst>
-                <a:ext uri="{FF2B5EF4-FFF2-40B4-BE49-F238E27FC236}">
-                  <a16:creationId xmlns:a16="http://schemas.microsoft.com/office/drawing/2014/main" id="{DBC3EB1A-1C14-D6AA-1C67-094B6B51FFC1}"/>
-                </a:ext>
-              </a:extLst>
-            </p:cNvPr>
-            <p:cNvPicPr>
-              <a:picLocks noChangeAspect="1"/>
-            </p:cNvPicPr>
-            <p:nvPr/>
-          </p:nvPicPr>
-          <p:blipFill>
-            <a:blip r:embed="rId3">
-              <a:extLst>
-                <a:ext uri="{28A0092B-C50C-407E-A947-70E740481C1C}">
-                  <a14:useLocalDpi xmlns:a14="http://schemas.microsoft.com/office/drawing/2010/main" val="0"/>
-                </a:ext>
-              </a:extLst>
-            </a:blip>
-            <a:srcRect l="19236" t="53020" r="59829" b="10038"/>
-            <a:stretch>
-              <a:fillRect/>
-            </a:stretch>
-          </p:blipFill>
-          <p:spPr>
-            <a:xfrm>
-              <a:off x="7839203" y="1724912"/>
-              <a:ext cx="3505200" cy="3724275"/>
-            </a:xfrm>
-            <a:prstGeom prst="rect">
-              <a:avLst/>
-            </a:prstGeom>
-          </p:spPr>
-        </p:pic>
-        <p:grpSp>
-          <p:nvGrpSpPr>
-            <p:cNvPr id="21" name="Gruppo 20">
-              <a:extLst>
-                <a:ext uri="{FF2B5EF4-FFF2-40B4-BE49-F238E27FC236}">
-                  <a16:creationId xmlns:a16="http://schemas.microsoft.com/office/drawing/2014/main" id="{6106C42C-6376-7C2A-E923-D74FB33D5EBC}"/>
-                </a:ext>
-              </a:extLst>
-            </p:cNvPr>
-            <p:cNvGrpSpPr/>
-            <p:nvPr/>
-          </p:nvGrpSpPr>
-          <p:grpSpPr>
-            <a:xfrm>
-              <a:off x="7934580" y="5449187"/>
-              <a:ext cx="3505201" cy="791505"/>
-              <a:chOff x="8029389" y="5543751"/>
-              <a:chExt cx="3505201" cy="791505"/>
-            </a:xfrm>
-          </p:grpSpPr>
-          <p:pic>
-            <p:nvPicPr>
-              <p:cNvPr id="20" name="Immagine 19">
-                <a:extLst>
-                  <a:ext uri="{FF2B5EF4-FFF2-40B4-BE49-F238E27FC236}">
-                    <a16:creationId xmlns:a16="http://schemas.microsoft.com/office/drawing/2014/main" id="{36C47B99-A44B-0EC6-EA6F-BEB981160C84}"/>
-                  </a:ext>
-                </a:extLst>
-              </p:cNvPr>
-              <p:cNvPicPr>
-                <a:picLocks noChangeAspect="1"/>
-              </p:cNvPicPr>
-              <p:nvPr/>
-            </p:nvPicPr>
-            <p:blipFill>
-              <a:blip r:embed="rId4"/>
-              <a:stretch>
-                <a:fillRect/>
-              </a:stretch>
-            </p:blipFill>
-            <p:spPr>
-              <a:xfrm>
-                <a:off x="8029389" y="5897106"/>
-                <a:ext cx="3505201" cy="438150"/>
-              </a:xfrm>
-              <a:prstGeom prst="rect">
-                <a:avLst/>
-              </a:prstGeom>
-            </p:spPr>
-          </p:pic>
-          <p:pic>
-            <p:nvPicPr>
-              <p:cNvPr id="17" name="Immagine 16">
-                <a:extLst>
-                  <a:ext uri="{FF2B5EF4-FFF2-40B4-BE49-F238E27FC236}">
-                    <a16:creationId xmlns:a16="http://schemas.microsoft.com/office/drawing/2014/main" id="{E19DF399-A1E8-DD2F-69C4-4788FDABF79F}"/>
-                  </a:ext>
-                </a:extLst>
-              </p:cNvPr>
-              <p:cNvPicPr>
-                <a:picLocks noChangeAspect="1"/>
-              </p:cNvPicPr>
-              <p:nvPr/>
-            </p:nvPicPr>
-            <p:blipFill>
-              <a:blip r:embed="rId5"/>
-              <a:stretch>
-                <a:fillRect/>
-              </a:stretch>
-            </p:blipFill>
-            <p:spPr>
-              <a:xfrm>
-                <a:off x="8477024" y="5543751"/>
-                <a:ext cx="2613522" cy="438150"/>
-              </a:xfrm>
-              <a:prstGeom prst="rect">
-                <a:avLst/>
-              </a:prstGeom>
-            </p:spPr>
-          </p:pic>
-        </p:grpSp>
-      </p:grpSp>
     </p:spTree>
     <p:extLst>
       <p:ext uri="{BB962C8B-B14F-4D97-AF65-F5344CB8AC3E}">
@@ -12235,7 +12250,7 @@
               <a:rPr lang="it-IT" sz="2800" b="1" dirty="0">
                 <a:latin typeface="Aptos" panose="020B0004020202020204" pitchFamily="34" charset="0"/>
               </a:rPr>
-              <a:t>non sempre migliore</a:t>
+              <a:t>non è sempre migliore</a:t>
             </a:r>
           </a:p>
           <a:p>

--- a/deliverables/presentation.pptx
+++ b/deliverables/presentation.pptx
@@ -5653,10 +5653,10 @@
               <a:buAutoNum type="arabicPeriod"/>
             </a:pPr>
             <a:r>
-              <a:rPr lang="it-IT" sz="2800" b="1" dirty="0" err="1">
-                <a:latin typeface="Aptos" panose="020B0004020202020204" pitchFamily="34" charset="0"/>
-              </a:rPr>
-              <a:t>Remapping</a:t>
+              <a:rPr lang="it-IT" sz="2800" b="1" dirty="0">
+                <a:latin typeface="Aptos" panose="020B0004020202020204" pitchFamily="34" charset="0"/>
+              </a:rPr>
+              <a:t>Mappatura</a:t>
             </a:r>
             <a:r>
               <a:rPr lang="it-IT" sz="2800" dirty="0">
@@ -9654,10 +9654,10 @@
       </p:grpSpPr>
       <p:grpSp>
         <p:nvGrpSpPr>
-          <p:cNvPr id="9" name="Gruppo 8">
-            <a:extLst>
-              <a:ext uri="{FF2B5EF4-FFF2-40B4-BE49-F238E27FC236}">
-                <a16:creationId xmlns:a16="http://schemas.microsoft.com/office/drawing/2014/main" id="{3D49715C-E534-CD43-024C-A2229E355DDA}"/>
+          <p:cNvPr id="8" name="Gruppo 7">
+            <a:extLst>
+              <a:ext uri="{FF2B5EF4-FFF2-40B4-BE49-F238E27FC236}">
+                <a16:creationId xmlns:a16="http://schemas.microsoft.com/office/drawing/2014/main" id="{74169C45-AD5D-A561-46AE-E3AEBA0754BC}"/>
               </a:ext>
             </a:extLst>
           </p:cNvPr>
@@ -9666,49 +9666,12 @@
         </p:nvGrpSpPr>
         <p:grpSpPr>
           <a:xfrm>
-            <a:off x="8270324" y="1274011"/>
-            <a:ext cx="3698228" cy="4688913"/>
-            <a:chOff x="8269978" y="1504154"/>
-            <a:chExt cx="3698228" cy="4688913"/>
+            <a:off x="8185274" y="1396663"/>
+            <a:ext cx="3590251" cy="4566261"/>
+            <a:chOff x="8185274" y="1396663"/>
+            <a:chExt cx="3590251" cy="4566261"/>
           </a:xfrm>
         </p:grpSpPr>
-        <p:pic>
-          <p:nvPicPr>
-            <p:cNvPr id="7" name="Immagine 6">
-              <a:extLst>
-                <a:ext uri="{FF2B5EF4-FFF2-40B4-BE49-F238E27FC236}">
-                  <a16:creationId xmlns:a16="http://schemas.microsoft.com/office/drawing/2014/main" id="{D0614128-731B-81BB-76DA-BCC33D46DC30}"/>
-                </a:ext>
-              </a:extLst>
-            </p:cNvPr>
-            <p:cNvPicPr>
-              <a:picLocks noChangeAspect="1"/>
-            </p:cNvPicPr>
-            <p:nvPr/>
-          </p:nvPicPr>
-          <p:blipFill>
-            <a:blip r:embed="rId3">
-              <a:extLst>
-                <a:ext uri="{28A0092B-C50C-407E-A947-70E740481C1C}">
-                  <a14:useLocalDpi xmlns:a14="http://schemas.microsoft.com/office/drawing/2010/main" val="0"/>
-                </a:ext>
-              </a:extLst>
-            </a:blip>
-            <a:srcRect l="18848" t="52166" r="58950" b="7195"/>
-            <a:stretch>
-              <a:fillRect/>
-            </a:stretch>
-          </p:blipFill>
-          <p:spPr>
-            <a:xfrm>
-              <a:off x="8269978" y="1504154"/>
-              <a:ext cx="3698228" cy="4072650"/>
-            </a:xfrm>
-            <a:prstGeom prst="rect">
-              <a:avLst/>
-            </a:prstGeom>
-          </p:spPr>
-        </p:pic>
         <p:grpSp>
           <p:nvGrpSpPr>
             <p:cNvPr id="21" name="Gruppo 20">
@@ -9723,7 +9686,7 @@
           </p:nvGrpSpPr>
           <p:grpSpPr>
             <a:xfrm>
-              <a:off x="8269978" y="5401562"/>
+              <a:off x="8270324" y="5171419"/>
               <a:ext cx="3505201" cy="791505"/>
               <a:chOff x="8029389" y="5543751"/>
               <a:chExt cx="3505201" cy="791505"/>
@@ -9744,7 +9707,7 @@
               <p:nvPr/>
             </p:nvPicPr>
             <p:blipFill>
-              <a:blip r:embed="rId4"/>
+              <a:blip r:embed="rId3"/>
               <a:stretch>
                 <a:fillRect/>
               </a:stretch>
@@ -9774,7 +9737,7 @@
               <p:nvPr/>
             </p:nvPicPr>
             <p:blipFill>
-              <a:blip r:embed="rId5"/>
+              <a:blip r:embed="rId4"/>
               <a:stretch>
                 <a:fillRect/>
               </a:stretch>
@@ -9790,6 +9753,43 @@
             </p:spPr>
           </p:pic>
         </p:grpSp>
+        <p:pic>
+          <p:nvPicPr>
+            <p:cNvPr id="2" name="Immagine 1">
+              <a:extLst>
+                <a:ext uri="{FF2B5EF4-FFF2-40B4-BE49-F238E27FC236}">
+                  <a16:creationId xmlns:a16="http://schemas.microsoft.com/office/drawing/2014/main" id="{398CD760-C613-5A13-962F-25287ADAEBCE}"/>
+                </a:ext>
+              </a:extLst>
+            </p:cNvPr>
+            <p:cNvPicPr>
+              <a:picLocks noChangeAspect="1"/>
+            </p:cNvPicPr>
+            <p:nvPr/>
+          </p:nvPicPr>
+          <p:blipFill>
+            <a:blip r:embed="rId5">
+              <a:extLst>
+                <a:ext uri="{28A0092B-C50C-407E-A947-70E740481C1C}">
+                  <a14:useLocalDpi xmlns:a14="http://schemas.microsoft.com/office/drawing/2010/main" val="0"/>
+                </a:ext>
+              </a:extLst>
+            </a:blip>
+            <a:srcRect l="19033" t="53192" r="60146" b="9867"/>
+            <a:stretch>
+              <a:fillRect/>
+            </a:stretch>
+          </p:blipFill>
+          <p:spPr>
+            <a:xfrm>
+              <a:off x="8185274" y="1396663"/>
+              <a:ext cx="3486150" cy="3724232"/>
+            </a:xfrm>
+            <a:prstGeom prst="rect">
+              <a:avLst/>
+            </a:prstGeom>
+          </p:spPr>
+        </p:pic>
       </p:grpSp>
       <p:sp>
         <p:nvSpPr>
@@ -10187,7 +10187,7 @@
               <a:rPr lang="it-IT" sz="2800" dirty="0">
                 <a:latin typeface="Aptos" panose="020B0004020202020204" pitchFamily="34" charset="0"/>
               </a:rPr>
-              <a:t>per individuare le regioni da separare</a:t>
+              <a:t>per generare le regioni da separare</a:t>
             </a:r>
           </a:p>
           <a:p>
@@ -10223,7 +10223,7 @@
               <a:rPr lang="it-IT" sz="2800" dirty="0">
                 <a:latin typeface="Aptos" panose="020B0004020202020204" pitchFamily="34" charset="0"/>
               </a:rPr>
-              <a:t>Migliora la </a:t>
+              <a:t>Valida la </a:t>
             </a:r>
             <a:r>
               <a:rPr lang="it-IT" sz="2800" b="1" dirty="0">
@@ -10633,7 +10633,7 @@
               <a:rPr lang="it-IT" sz="2800" b="1" dirty="0">
                 <a:latin typeface="Aptos" panose="020B0004020202020204" pitchFamily="34" charset="0"/>
               </a:rPr>
-              <a:t>Obiettivo: Rifinire la maschera ottenuta </a:t>
+              <a:t>Obiettivo: Rifinire la maschera finale </a:t>
             </a:r>
             <a:r>
               <a:rPr lang="it-IT" sz="2800" dirty="0">
@@ -10721,10 +10721,10 @@
         </p:nvGrpSpPr>
         <p:grpSpPr>
           <a:xfrm>
-            <a:off x="8609694" y="142346"/>
-            <a:ext cx="3117715" cy="6217776"/>
-            <a:chOff x="8619024" y="179668"/>
-            <a:chExt cx="3117715" cy="6217776"/>
+            <a:off x="8609694" y="170689"/>
+            <a:ext cx="3117715" cy="6189433"/>
+            <a:chOff x="8619024" y="208011"/>
+            <a:chExt cx="3117715" cy="6189433"/>
           </a:xfrm>
         </p:grpSpPr>
         <p:pic>
@@ -10749,15 +10749,15 @@
                 </a:ext>
               </a:extLst>
             </a:blip>
-            <a:srcRect l="11102" t="15700" r="51913" b="22502"/>
+            <a:srcRect l="11102" t="16259" r="51913" b="22502"/>
             <a:stretch>
               <a:fillRect/>
             </a:stretch>
           </p:blipFill>
           <p:spPr>
             <a:xfrm>
-              <a:off x="8619024" y="179668"/>
-              <a:ext cx="3117715" cy="3136886"/>
+              <a:off x="8619024" y="208011"/>
+              <a:ext cx="3117715" cy="3108543"/>
             </a:xfrm>
             <a:prstGeom prst="rect">
               <a:avLst/>
@@ -12306,14 +12306,14 @@
           <p:nvPr>
             <p:extLst>
               <p:ext uri="{D42A27DB-BD31-4B8C-83A1-F6EECF244321}">
-                <p14:modId xmlns:p14="http://schemas.microsoft.com/office/powerpoint/2010/main" val="1184009350"/>
+                <p14:modId xmlns:p14="http://schemas.microsoft.com/office/powerpoint/2010/main" val="500889681"/>
               </p:ext>
             </p:extLst>
           </p:nvPr>
         </p:nvGraphicFramePr>
         <p:xfrm>
-          <a:off x="657225" y="3913923"/>
-          <a:ext cx="7797800" cy="1942143"/>
+          <a:off x="2114032" y="3637339"/>
+          <a:ext cx="7963935" cy="2302705"/>
         </p:xfrm>
         <a:graphic>
           <a:graphicData uri="http://schemas.openxmlformats.org/drawingml/2006/table">
@@ -12322,42 +12322,42 @@
                 <a:tableStyleId>{8EC20E35-A176-4012-BC5E-935CFFF8708E}</a:tableStyleId>
               </a:tblPr>
               <a:tblGrid>
-                <a:gridCol w="1651318">
+                <a:gridCol w="1686500">
                   <a:extLst>
                     <a:ext uri="{9D8B030D-6E8A-4147-A177-3AD203B41FA5}">
                       <a16:colId xmlns:a16="http://schemas.microsoft.com/office/drawing/2014/main" val="1381477919"/>
                     </a:ext>
                   </a:extLst>
                 </a:gridCol>
-                <a:gridCol w="1211580">
+                <a:gridCol w="1237393">
                   <a:extLst>
                     <a:ext uri="{9D8B030D-6E8A-4147-A177-3AD203B41FA5}">
                       <a16:colId xmlns:a16="http://schemas.microsoft.com/office/drawing/2014/main" val="1953155594"/>
                     </a:ext>
                   </a:extLst>
                 </a:gridCol>
-                <a:gridCol w="1205230">
+                <a:gridCol w="1230908">
                   <a:extLst>
                     <a:ext uri="{9D8B030D-6E8A-4147-A177-3AD203B41FA5}">
                       <a16:colId xmlns:a16="http://schemas.microsoft.com/office/drawing/2014/main" val="193636761"/>
                     </a:ext>
                   </a:extLst>
                 </a:gridCol>
-                <a:gridCol w="1087755">
+                <a:gridCol w="1110930">
                   <a:extLst>
                     <a:ext uri="{9D8B030D-6E8A-4147-A177-3AD203B41FA5}">
                       <a16:colId xmlns:a16="http://schemas.microsoft.com/office/drawing/2014/main" val="2382885218"/>
                     </a:ext>
                   </a:extLst>
                 </a:gridCol>
-                <a:gridCol w="1346517">
+                <a:gridCol w="1375205">
                   <a:extLst>
                     <a:ext uri="{9D8B030D-6E8A-4147-A177-3AD203B41FA5}">
                       <a16:colId xmlns:a16="http://schemas.microsoft.com/office/drawing/2014/main" val="1584489291"/>
                     </a:ext>
                   </a:extLst>
                 </a:gridCol>
-                <a:gridCol w="1295400">
+                <a:gridCol w="1322999">
                   <a:extLst>
                     <a:ext uri="{9D8B030D-6E8A-4147-A177-3AD203B41FA5}">
                       <a16:colId xmlns:a16="http://schemas.microsoft.com/office/drawing/2014/main" val="3143600087"/>
@@ -12365,7 +12365,7 @@
                   </a:extLst>
                 </a:gridCol>
               </a:tblGrid>
-              <a:tr h="458783">
+              <a:tr h="543957">
                 <a:tc>
                   <a:txBody>
                     <a:bodyPr/>
@@ -12498,7 +12498,7 @@
                   </a:ext>
                 </a:extLst>
               </a:tr>
-              <a:tr h="370840">
+              <a:tr h="439687">
                 <a:tc>
                   <a:txBody>
                     <a:bodyPr/>
@@ -12616,7 +12616,7 @@
                   </a:ext>
                 </a:extLst>
               </a:tr>
-              <a:tr h="370840">
+              <a:tr h="439687">
                 <a:tc>
                   <a:txBody>
                     <a:bodyPr/>
@@ -12734,7 +12734,7 @@
                   </a:ext>
                 </a:extLst>
               </a:tr>
-              <a:tr h="370840">
+              <a:tr h="439687">
                 <a:tc>
                   <a:txBody>
                     <a:bodyPr/>
@@ -12852,7 +12852,7 @@
                   </a:ext>
                 </a:extLst>
               </a:tr>
-              <a:tr h="370840">
+              <a:tr h="439687">
                 <a:tc>
                   <a:txBody>
                     <a:bodyPr/>
@@ -12971,110 +12971,6 @@
           </a:graphicData>
         </a:graphic>
       </p:graphicFrame>
-      <p:sp>
-        <p:nvSpPr>
-          <p:cNvPr id="8" name="CasellaDiTesto 7">
-            <a:extLst>
-              <a:ext uri="{FF2B5EF4-FFF2-40B4-BE49-F238E27FC236}">
-                <a16:creationId xmlns:a16="http://schemas.microsoft.com/office/drawing/2014/main" id="{B10E620F-3D13-1C6B-DA4B-FBA91D19DD2B}"/>
-              </a:ext>
-            </a:extLst>
-          </p:cNvPr>
-          <p:cNvSpPr txBox="1"/>
-          <p:nvPr/>
-        </p:nvSpPr>
-        <p:spPr>
-          <a:xfrm>
-            <a:off x="9109187" y="3453833"/>
-            <a:ext cx="2562237" cy="2862322"/>
-          </a:xfrm>
-          <a:prstGeom prst="rect">
-            <a:avLst/>
-          </a:prstGeom>
-          <a:noFill/>
-        </p:spPr>
-        <p:txBody>
-          <a:bodyPr wrap="square">
-            <a:spAutoFit/>
-          </a:bodyPr>
-          <a:lstStyle/>
-          <a:p>
-            <a:pPr algn="just"/>
-            <a:r>
-              <a:rPr lang="it-IT" sz="2800" b="1" dirty="0">
-                <a:latin typeface="Aptos" panose="020B0004020202020204" pitchFamily="34" charset="0"/>
-              </a:rPr>
-              <a:t>Casi Migliori</a:t>
-            </a:r>
-          </a:p>
-          <a:p>
-            <a:pPr marL="457200" indent="-457200" algn="just">
-              <a:buFont typeface="Arial" panose="020B0604020202020204" pitchFamily="34" charset="0"/>
-              <a:buChar char="•"/>
-            </a:pPr>
-            <a:r>
-              <a:rPr lang="it-IT" sz="2800" dirty="0">
-                <a:latin typeface="Aptos" panose="020B0004020202020204" pitchFamily="34" charset="0"/>
-              </a:rPr>
-              <a:t>BRATS_128</a:t>
-            </a:r>
-          </a:p>
-          <a:p>
-            <a:pPr marL="457200" lvl="1" indent="-457200" algn="just">
-              <a:buFont typeface="Arial" panose="020B0604020202020204" pitchFamily="34" charset="0"/>
-              <a:buChar char="•"/>
-            </a:pPr>
-            <a:r>
-              <a:rPr lang="it-IT" sz="2800" dirty="0">
-                <a:latin typeface="Aptos" panose="020B0004020202020204" pitchFamily="34" charset="0"/>
-              </a:rPr>
-              <a:t>BRATS_248</a:t>
-            </a:r>
-          </a:p>
-          <a:p>
-            <a:pPr marL="457200" lvl="1" indent="-457200" algn="just">
-              <a:buFont typeface="Arial" panose="020B0604020202020204" pitchFamily="34" charset="0"/>
-              <a:buChar char="•"/>
-            </a:pPr>
-            <a:endParaRPr lang="it-IT" sz="1050" b="1" dirty="0">
-              <a:latin typeface="Aptos" panose="020B0004020202020204" pitchFamily="34" charset="0"/>
-            </a:endParaRPr>
-          </a:p>
-          <a:p>
-            <a:pPr lvl="1" algn="just"/>
-            <a:r>
-              <a:rPr lang="it-IT" sz="2800" b="1" dirty="0">
-                <a:latin typeface="Aptos" panose="020B0004020202020204" pitchFamily="34" charset="0"/>
-              </a:rPr>
-              <a:t>Casi Peggiori</a:t>
-            </a:r>
-          </a:p>
-          <a:p>
-            <a:pPr marL="457200" lvl="1" indent="-457200" algn="just">
-              <a:buFont typeface="Arial" panose="020B0604020202020204" pitchFamily="34" charset="0"/>
-              <a:buChar char="•"/>
-            </a:pPr>
-            <a:r>
-              <a:rPr lang="it-IT" sz="2800" dirty="0">
-                <a:latin typeface="Aptos" panose="020B0004020202020204" pitchFamily="34" charset="0"/>
-              </a:rPr>
-              <a:t>BRATS_140</a:t>
-            </a:r>
-          </a:p>
-          <a:p>
-            <a:pPr marL="457200" lvl="1" indent="-457200" algn="just">
-              <a:buFont typeface="Arial" panose="020B0604020202020204" pitchFamily="34" charset="0"/>
-              <a:buChar char="•"/>
-            </a:pPr>
-            <a:r>
-              <a:rPr lang="it-IT" sz="2800" dirty="0">
-                <a:latin typeface="Aptos" panose="020B0004020202020204" pitchFamily="34" charset="0"/>
-              </a:rPr>
-              <a:t>BRATS_380</a:t>
-            </a:r>
-          </a:p>
-        </p:txBody>
-      </p:sp>
     </p:spTree>
     <p:extLst>
       <p:ext uri="{BB962C8B-B14F-4D97-AF65-F5344CB8AC3E}">
@@ -13788,7 +13684,7 @@
               <a:rPr lang="it-IT" sz="2800" b="1" dirty="0">
                 <a:latin typeface="Aptos" panose="020B0004020202020204" pitchFamily="34" charset="0"/>
               </a:rPr>
-              <a:t>Casi Migliori BRATS_128 e BRATS_248</a:t>
+              <a:t>Casi Migliori: BRATS_128 e BRATS_248</a:t>
             </a:r>
           </a:p>
         </p:txBody>
@@ -14554,7 +14450,7 @@
               <a:rPr lang="it-IT" sz="2800" b="1" dirty="0">
                 <a:latin typeface="Aptos" panose="020B0004020202020204" pitchFamily="34" charset="0"/>
               </a:rPr>
-              <a:t>Casi Peggiori BRATS_140 e BRATS_380</a:t>
+              <a:t>Casi Peggiori: BRATS_140 e BRATS_380</a:t>
             </a:r>
           </a:p>
         </p:txBody>
@@ -14680,6 +14576,53 @@
           <a:chExt cx="0" cy="0"/>
         </a:xfrm>
       </p:grpSpPr>
+      <p:pic>
+        <p:nvPicPr>
+          <p:cNvPr id="2054" name="Picture 6">
+            <a:extLst>
+              <a:ext uri="{FF2B5EF4-FFF2-40B4-BE49-F238E27FC236}">
+                <a16:creationId xmlns:a16="http://schemas.microsoft.com/office/drawing/2014/main" id="{33E9C42F-2060-F6D4-4E58-648AC05A6F90}"/>
+              </a:ext>
+            </a:extLst>
+          </p:cNvPr>
+          <p:cNvPicPr>
+            <a:picLocks noChangeAspect="1" noChangeArrowheads="1"/>
+          </p:cNvPicPr>
+          <p:nvPr/>
+        </p:nvPicPr>
+        <p:blipFill rotWithShape="1">
+          <a:blip r:embed="rId3">
+            <a:extLst>
+              <a:ext uri="{28A0092B-C50C-407E-A947-70E740481C1C}">
+                <a14:useLocalDpi xmlns:a14="http://schemas.microsoft.com/office/drawing/2010/main" val="0"/>
+              </a:ext>
+            </a:extLst>
+          </a:blip>
+          <a:srcRect r="3247"/>
+          <a:stretch>
+            <a:fillRect/>
+          </a:stretch>
+        </p:blipFill>
+        <p:spPr bwMode="auto">
+          <a:xfrm>
+            <a:off x="7043480" y="3174330"/>
+            <a:ext cx="4843707" cy="1540378"/>
+          </a:xfrm>
+          <a:prstGeom prst="rect">
+            <a:avLst/>
+          </a:prstGeom>
+          <a:noFill/>
+          <a:extLst>
+            <a:ext uri="{909E8E84-426E-40DD-AFC4-6F175D3DCCD1}">
+              <a14:hiddenFill xmlns:a14="http://schemas.microsoft.com/office/drawing/2010/main">
+                <a:solidFill>
+                  <a:srgbClr val="FFFFFF"/>
+                </a:solidFill>
+              </a14:hiddenFill>
+            </a:ext>
+          </a:extLst>
+        </p:spPr>
+      </p:pic>
       <p:sp>
         <p:nvSpPr>
           <p:cNvPr id="5" name="CasellaDiTesto 4">
@@ -14950,8 +14893,8 @@
         </p:nvSpPr>
         <p:spPr>
           <a:xfrm>
-            <a:off x="609600" y="1378001"/>
-            <a:ext cx="10867053" cy="5109091"/>
+            <a:off x="609600" y="1384404"/>
+            <a:ext cx="10867053" cy="4801314"/>
           </a:xfrm>
           <a:prstGeom prst="rect">
             <a:avLst/>
@@ -14984,12 +14927,24 @@
               <a:rPr lang="it-IT" sz="2800" b="1" dirty="0">
                 <a:latin typeface="Aptos" panose="020B0004020202020204" pitchFamily="34" charset="0"/>
               </a:rPr>
-              <a:t>migliori prestazioni medie </a:t>
+              <a:t>migliori prestazioni </a:t>
             </a:r>
             <a:r>
               <a:rPr lang="it-IT" sz="2800" dirty="0">
                 <a:latin typeface="Aptos" panose="020B0004020202020204" pitchFamily="34" charset="0"/>
               </a:rPr>
+              <a:t>medie</a:t>
+            </a:r>
+            <a:r>
+              <a:rPr lang="it-IT" sz="2800" b="1" dirty="0">
+                <a:latin typeface="Aptos" panose="020B0004020202020204" pitchFamily="34" charset="0"/>
+              </a:rPr>
+              <a:t> </a:t>
+            </a:r>
+            <a:r>
+              <a:rPr lang="it-IT" sz="2800" dirty="0">
+                <a:latin typeface="Aptos" panose="020B0004020202020204" pitchFamily="34" charset="0"/>
+              </a:rPr>
               <a:t>e </a:t>
             </a:r>
             <a:r>
@@ -15008,11 +14963,14 @@
               <a:rPr lang="it-IT" sz="2800" b="1" dirty="0">
                 <a:latin typeface="Aptos" panose="020B0004020202020204" pitchFamily="34" charset="0"/>
               </a:rPr>
-              <a:t>sequenza singola più informativa</a:t>
-            </a:r>
-            <a:endParaRPr lang="it-IT" sz="2800" dirty="0">
-              <a:latin typeface="Aptos" panose="020B0004020202020204" pitchFamily="34" charset="0"/>
-            </a:endParaRPr>
+              <a:t>sequenza singola </a:t>
+            </a:r>
+            <a:r>
+              <a:rPr lang="it-IT" sz="2800" dirty="0">
+                <a:latin typeface="Aptos" panose="020B0004020202020204" pitchFamily="34" charset="0"/>
+              </a:rPr>
+              <a:t>più informativa</a:t>
+            </a:r>
           </a:p>
           <a:p>
             <a:pPr marL="514350" indent="-514350" algn="just">
@@ -15023,19 +14981,7 @@
               <a:rPr lang="it-IT" sz="2800" dirty="0">
                 <a:latin typeface="Aptos" panose="020B0004020202020204" pitchFamily="34" charset="0"/>
               </a:rPr>
-              <a:t>La </a:t>
-            </a:r>
-            <a:r>
-              <a:rPr lang="it-IT" sz="2800" b="1" dirty="0">
-                <a:latin typeface="Aptos" panose="020B0004020202020204" pitchFamily="34" charset="0"/>
-              </a:rPr>
-              <a:t>multimodalità</a:t>
-            </a:r>
-            <a:r>
-              <a:rPr lang="it-IT" sz="2800" dirty="0">
-                <a:latin typeface="Aptos" panose="020B0004020202020204" pitchFamily="34" charset="0"/>
-              </a:rPr>
-              <a:t> </a:t>
+              <a:t>La multimodalità </a:t>
             </a:r>
             <a:r>
               <a:rPr lang="it-IT" sz="2800" b="1" dirty="0">
@@ -15097,13 +15043,7 @@
           </a:p>
           <a:p>
             <a:pPr algn="just"/>
-            <a:r>
-              <a:rPr lang="it-IT" sz="2800" b="1" dirty="0">
-                <a:latin typeface="Aptos" panose="020B0004020202020204" pitchFamily="34" charset="0"/>
-              </a:rPr>
-              <a:t>Sviluppi Futuri</a:t>
-            </a:r>
-            <a:endParaRPr lang="it-IT" sz="2800" dirty="0">
+            <a:endParaRPr lang="it-IT" dirty="0">
               <a:latin typeface="Aptos" panose="020B0004020202020204" pitchFamily="34" charset="0"/>
             </a:endParaRPr>
           </a:p>
@@ -15112,24 +15052,21 @@
               <a:buFont typeface="Arial" panose="020B0604020202020204" pitchFamily="34" charset="0"/>
               <a:buChar char="•"/>
             </a:pPr>
-            <a:r>
-              <a:rPr lang="it-IT" sz="2800" dirty="0">
-                <a:latin typeface="Aptos" panose="020B0004020202020204" pitchFamily="34" charset="0"/>
-              </a:rPr>
-              <a:t>Migliorare la </a:t>
-            </a:r>
+            <a:endParaRPr lang="it-IT" dirty="0">
+              <a:latin typeface="Aptos" panose="020B0004020202020204" pitchFamily="34" charset="0"/>
+            </a:endParaRPr>
+          </a:p>
+          <a:p>
+            <a:pPr algn="just"/>
             <a:r>
               <a:rPr lang="it-IT" sz="2800" b="1" dirty="0">
                 <a:latin typeface="Aptos" panose="020B0004020202020204" pitchFamily="34" charset="0"/>
               </a:rPr>
-              <a:t>strategia di fusione </a:t>
-            </a:r>
-            <a:r>
-              <a:rPr lang="it-IT" sz="2800" dirty="0">
-                <a:latin typeface="Aptos" panose="020B0004020202020204" pitchFamily="34" charset="0"/>
-              </a:rPr>
-              <a:t>multimodale</a:t>
-            </a:r>
+              <a:t>Sviluppi Futuri</a:t>
+            </a:r>
+            <a:endParaRPr lang="it-IT" sz="2800" dirty="0">
+              <a:latin typeface="Aptos" panose="020B0004020202020204" pitchFamily="34" charset="0"/>
+            </a:endParaRPr>
           </a:p>
           <a:p>
             <a:pPr marL="514350" indent="-514350" algn="just">
@@ -15140,32 +15077,17 @@
               <a:rPr lang="it-IT" sz="2800" dirty="0">
                 <a:latin typeface="Aptos" panose="020B0004020202020204" pitchFamily="34" charset="0"/>
               </a:rPr>
-              <a:t>Confrontare </a:t>
+              <a:t>Estendere la pipeline </a:t>
             </a:r>
             <a:r>
               <a:rPr lang="it-IT" sz="2800" b="1" dirty="0">
                 <a:latin typeface="Aptos" panose="020B0004020202020204" pitchFamily="34" charset="0"/>
               </a:rPr>
-              <a:t>altre tecniche classiche </a:t>
-            </a:r>
-            <a:r>
-              <a:rPr lang="it-IT" sz="2800" dirty="0">
-                <a:latin typeface="Aptos" panose="020B0004020202020204" pitchFamily="34" charset="0"/>
-              </a:rPr>
-              <a:t>(K-Means o Edge-</a:t>
-            </a:r>
-            <a:r>
-              <a:rPr lang="it-IT" sz="2800" dirty="0" err="1">
-                <a:latin typeface="Aptos" panose="020B0004020202020204" pitchFamily="34" charset="0"/>
-              </a:rPr>
-              <a:t>Based</a:t>
-            </a:r>
-            <a:r>
-              <a:rPr lang="it-IT" sz="2800" dirty="0">
-                <a:latin typeface="Aptos" panose="020B0004020202020204" pitchFamily="34" charset="0"/>
-              </a:rPr>
-              <a:t>)</a:t>
-            </a:r>
+              <a:t>da 2D a 3D</a:t>
+            </a:r>
+            <a:endParaRPr lang="it-IT" sz="2800" dirty="0">
+              <a:latin typeface="Aptos" panose="020B0004020202020204" pitchFamily="34" charset="0"/>
+            </a:endParaRPr>
           </a:p>
           <a:p>
             <a:pPr marL="514350" indent="-514350" algn="just">
@@ -15176,17 +15098,20 @@
               <a:rPr lang="it-IT" sz="2800" dirty="0">
                 <a:latin typeface="Aptos" panose="020B0004020202020204" pitchFamily="34" charset="0"/>
               </a:rPr>
-              <a:t>Estendere la pipeline </a:t>
+              <a:t>Migliorare la </a:t>
             </a:r>
             <a:r>
               <a:rPr lang="it-IT" sz="2800" b="1" dirty="0">
                 <a:latin typeface="Aptos" panose="020B0004020202020204" pitchFamily="34" charset="0"/>
               </a:rPr>
-              <a:t>da 2D a 3D</a:t>
-            </a:r>
-            <a:endParaRPr lang="it-IT" sz="2800" dirty="0">
-              <a:latin typeface="Aptos" panose="020B0004020202020204" pitchFamily="34" charset="0"/>
-            </a:endParaRPr>
+              <a:t>strategia di fusione </a:t>
+            </a:r>
+            <a:r>
+              <a:rPr lang="it-IT" sz="2800" dirty="0">
+                <a:latin typeface="Aptos" panose="020B0004020202020204" pitchFamily="34" charset="0"/>
+              </a:rPr>
+              <a:t>multimodale</a:t>
+            </a:r>
           </a:p>
           <a:p>
             <a:pPr marL="514350" indent="-514350" algn="just">
@@ -15197,91 +15122,65 @@
               <a:rPr lang="it-IT" sz="2800" dirty="0">
                 <a:latin typeface="Aptos" panose="020B0004020202020204" pitchFamily="34" charset="0"/>
               </a:rPr>
+              <a:t>Confrontare </a:t>
+            </a:r>
+            <a:r>
+              <a:rPr lang="it-IT" sz="2800" b="1" dirty="0">
+                <a:latin typeface="Aptos" panose="020B0004020202020204" pitchFamily="34" charset="0"/>
+              </a:rPr>
+              <a:t>altre tecniche tradizionali </a:t>
+            </a:r>
+            <a:r>
+              <a:rPr lang="it-IT" sz="2800" dirty="0">
+                <a:latin typeface="Aptos" panose="020B0004020202020204" pitchFamily="34" charset="0"/>
+              </a:rPr>
+              <a:t>(Clustering, Edge-</a:t>
+            </a:r>
+            <a:r>
+              <a:rPr lang="it-IT" sz="2800" dirty="0" err="1">
+                <a:latin typeface="Aptos" panose="020B0004020202020204" pitchFamily="34" charset="0"/>
+              </a:rPr>
+              <a:t>Based</a:t>
+            </a:r>
+            <a:r>
+              <a:rPr lang="it-IT" sz="2800" dirty="0">
+                <a:latin typeface="Aptos" panose="020B0004020202020204" pitchFamily="34" charset="0"/>
+              </a:rPr>
+              <a:t>)</a:t>
+            </a:r>
+          </a:p>
+          <a:p>
+            <a:pPr marL="514350" indent="-514350" algn="just">
+              <a:buFont typeface="Arial" panose="020B0604020202020204" pitchFamily="34" charset="0"/>
+              <a:buChar char="•"/>
+            </a:pPr>
+            <a:r>
+              <a:rPr lang="it-IT" sz="2800" dirty="0">
+                <a:latin typeface="Aptos" panose="020B0004020202020204" pitchFamily="34" charset="0"/>
+              </a:rPr>
               <a:t>Integrare modelli di </a:t>
             </a:r>
             <a:r>
               <a:rPr lang="it-IT" sz="2800" b="1" dirty="0">
                 <a:latin typeface="Aptos" panose="020B0004020202020204" pitchFamily="34" charset="0"/>
               </a:rPr>
-              <a:t>Deep Learning</a:t>
-            </a:r>
-          </a:p>
-          <a:p>
-            <a:pPr algn="just"/>
+              <a:t>Deep Learning </a:t>
+            </a:r>
+            <a:r>
+              <a:rPr lang="it-IT" sz="2800" dirty="0">
+                <a:latin typeface="Aptos" panose="020B0004020202020204" pitchFamily="34" charset="0"/>
+              </a:rPr>
+              <a:t>e</a:t>
+            </a:r>
             <a:r>
               <a:rPr lang="it-IT" sz="2800" b="1" dirty="0">
                 <a:latin typeface="Aptos" panose="020B0004020202020204" pitchFamily="34" charset="0"/>
               </a:rPr>
-              <a:t>       </a:t>
-            </a:r>
-            <a:r>
-              <a:rPr lang="it-IT" sz="2800" dirty="0">
-                <a:latin typeface="Aptos" panose="020B0004020202020204" pitchFamily="34" charset="0"/>
-              </a:rPr>
-              <a:t>e</a:t>
-            </a:r>
-            <a:r>
-              <a:rPr lang="it-IT" sz="2800" b="1" dirty="0">
-                <a:latin typeface="Aptos" panose="020B0004020202020204" pitchFamily="34" charset="0"/>
-              </a:rPr>
               <a:t> Machine Learning</a:t>
             </a:r>
           </a:p>
-          <a:p>
-            <a:pPr algn="just"/>
-            <a:endParaRPr lang="it-IT" sz="2800" dirty="0">
-              <a:latin typeface="Aptos" panose="020B0004020202020204" pitchFamily="34" charset="0"/>
-            </a:endParaRPr>
-          </a:p>
         </p:txBody>
       </p:sp>
-      <p:pic>
-        <p:nvPicPr>
-          <p:cNvPr id="2054" name="Picture 6">
-            <a:extLst>
-              <a:ext uri="{FF2B5EF4-FFF2-40B4-BE49-F238E27FC236}">
-                <a16:creationId xmlns:a16="http://schemas.microsoft.com/office/drawing/2014/main" id="{33E9C42F-2060-F6D4-4E58-648AC05A6F90}"/>
-              </a:ext>
-            </a:extLst>
-          </p:cNvPr>
-          <p:cNvPicPr>
-            <a:picLocks noChangeAspect="1" noChangeArrowheads="1"/>
-          </p:cNvPicPr>
-          <p:nvPr/>
-        </p:nvPicPr>
-        <p:blipFill>
-          <a:blip r:embed="rId3">
-            <a:extLst>
-              <a:ext uri="{28A0092B-C50C-407E-A947-70E740481C1C}">
-                <a14:useLocalDpi xmlns:a14="http://schemas.microsoft.com/office/drawing/2010/main" val="0"/>
-              </a:ext>
-            </a:extLst>
-          </a:blip>
-          <a:srcRect/>
-          <a:stretch>
-            <a:fillRect/>
-          </a:stretch>
-        </p:blipFill>
-        <p:spPr bwMode="auto">
-          <a:xfrm>
-            <a:off x="6927612" y="4767784"/>
-            <a:ext cx="5006230" cy="1540378"/>
-          </a:xfrm>
-          <a:prstGeom prst="rect">
-            <a:avLst/>
-          </a:prstGeom>
-          <a:noFill/>
-          <a:extLst>
-            <a:ext uri="{909E8E84-426E-40DD-AFC4-6F175D3DCCD1}">
-              <a14:hiddenFill xmlns:a14="http://schemas.microsoft.com/office/drawing/2010/main">
-                <a:solidFill>
-                  <a:srgbClr val="FFFFFF"/>
-                </a:solidFill>
-              </a14:hiddenFill>
-            </a:ext>
-          </a:extLst>
-        </p:spPr>
-      </p:pic>
     </p:spTree>
     <p:extLst>
       <p:ext uri="{BB962C8B-B14F-4D97-AF65-F5344CB8AC3E}">
@@ -17484,7 +17383,7 @@
               <a:rPr lang="it-IT" sz="2800" dirty="0">
                 <a:latin typeface="Aptos" panose="020B0004020202020204" pitchFamily="34" charset="0"/>
               </a:rPr>
-              <a:t>Tecniche di Image Processing in cascata</a:t>
+              <a:t>Applicazione delle tecniche di Image Processing</a:t>
             </a:r>
           </a:p>
           <a:p>
@@ -17996,7 +17895,7 @@
               <a:rPr lang="it-IT" sz="2800" b="1" dirty="0">
                 <a:latin typeface="Aptos" panose="020B0004020202020204" pitchFamily="34" charset="0"/>
               </a:rPr>
-              <a:t>Obiettivo EDA: </a:t>
+              <a:t>Obiettivo: </a:t>
             </a:r>
             <a:r>
               <a:rPr lang="it-IT" sz="2800" dirty="0">
@@ -18804,7 +18703,7 @@
               <a:rPr lang="it-IT" sz="2800" b="1" dirty="0">
                 <a:latin typeface="Aptos" panose="020B0004020202020204" pitchFamily="34" charset="0"/>
               </a:rPr>
-              <a:t>Selezione Slice Migliore</a:t>
+              <a:t>Selezione Slice Ottimale</a:t>
             </a:r>
           </a:p>
           <a:p>

--- a/deliverables/presentation.pptx
+++ b/deliverables/presentation.pptx
@@ -13570,10 +13570,10 @@
         </p:nvGrpSpPr>
         <p:grpSpPr>
           <a:xfrm>
-            <a:off x="263598" y="1756901"/>
-            <a:ext cx="11855303" cy="4076623"/>
-            <a:chOff x="247649" y="1894631"/>
-            <a:chExt cx="11855303" cy="4076623"/>
+            <a:off x="162976" y="1755937"/>
+            <a:ext cx="12029024" cy="4076623"/>
+            <a:chOff x="147027" y="1893667"/>
+            <a:chExt cx="12029024" cy="4076623"/>
           </a:xfrm>
         </p:grpSpPr>
         <p:pic>
@@ -13605,7 +13605,7 @@
           </p:blipFill>
           <p:spPr>
             <a:xfrm>
-              <a:off x="6169928" y="1894631"/>
+              <a:off x="6243027" y="1893667"/>
               <a:ext cx="5933024" cy="4076623"/>
             </a:xfrm>
             <a:prstGeom prst="rect">
@@ -13642,7 +13642,7 @@
           </p:blipFill>
           <p:spPr>
             <a:xfrm>
-              <a:off x="247649" y="1894632"/>
+              <a:off x="147027" y="1893667"/>
               <a:ext cx="5933024" cy="3748374"/>
             </a:xfrm>
             <a:prstGeom prst="rect">
@@ -14018,6 +14018,48 @@
           </a:p>
         </p:txBody>
       </p:sp>
+      <p:cxnSp>
+        <p:nvCxnSpPr>
+          <p:cNvPr id="8" name="Connettore diritto 7">
+            <a:extLst>
+              <a:ext uri="{FF2B5EF4-FFF2-40B4-BE49-F238E27FC236}">
+                <a16:creationId xmlns:a16="http://schemas.microsoft.com/office/drawing/2014/main" id="{1D19631A-9FAC-D2F4-DE49-B3AD2AA39C6A}"/>
+              </a:ext>
+            </a:extLst>
+          </p:cNvPr>
+          <p:cNvCxnSpPr/>
+          <p:nvPr/>
+        </p:nvCxnSpPr>
+        <p:spPr>
+          <a:xfrm>
+            <a:off x="6108441" y="1912026"/>
+            <a:ext cx="0" cy="3592285"/>
+          </a:xfrm>
+          <a:prstGeom prst="line">
+            <a:avLst/>
+          </a:prstGeom>
+          <a:ln w="9525">
+            <a:solidFill>
+              <a:schemeClr val="tx1"/>
+            </a:solidFill>
+          </a:ln>
+          <a:effectLst/>
+        </p:spPr>
+        <p:style>
+          <a:lnRef idx="1">
+            <a:schemeClr val="accent1"/>
+          </a:lnRef>
+          <a:fillRef idx="0">
+            <a:schemeClr val="accent1"/>
+          </a:fillRef>
+          <a:effectRef idx="0">
+            <a:schemeClr val="accent1"/>
+          </a:effectRef>
+          <a:fontRef idx="minor">
+            <a:schemeClr val="tx1"/>
+          </a:fontRef>
+        </p:style>
+      </p:cxnSp>
     </p:spTree>
     <p:extLst>
       <p:ext uri="{BB962C8B-B14F-4D97-AF65-F5344CB8AC3E}">
@@ -14080,10 +14122,10 @@
         </p:nvGrpSpPr>
         <p:grpSpPr>
           <a:xfrm>
-            <a:off x="216958" y="1768327"/>
-            <a:ext cx="11928402" cy="4115151"/>
-            <a:chOff x="206448" y="2021951"/>
-            <a:chExt cx="11928402" cy="4115151"/>
+            <a:off x="123649" y="1768327"/>
+            <a:ext cx="12062128" cy="4115151"/>
+            <a:chOff x="187786" y="2021951"/>
+            <a:chExt cx="12062128" cy="4115151"/>
           </a:xfrm>
         </p:grpSpPr>
         <p:pic>
@@ -14115,7 +14157,7 @@
           </p:blipFill>
           <p:spPr>
             <a:xfrm>
-              <a:off x="206448" y="2021951"/>
+              <a:off x="187786" y="2021951"/>
               <a:ext cx="6051477" cy="3773393"/>
             </a:xfrm>
             <a:prstGeom prst="rect">
@@ -14145,15 +14187,15 @@
                 </a:ext>
               </a:extLst>
             </a:blip>
-            <a:srcRect l="12694" t="7658" r="6789" b="1731"/>
+            <a:srcRect l="12694" t="7658" r="7125" b="1731"/>
             <a:stretch>
               <a:fillRect/>
             </a:stretch>
           </p:blipFill>
           <p:spPr>
             <a:xfrm>
-              <a:off x="6162675" y="2093598"/>
-              <a:ext cx="5972175" cy="4043504"/>
+              <a:off x="6302639" y="2093598"/>
+              <a:ext cx="5947275" cy="4043504"/>
             </a:xfrm>
             <a:prstGeom prst="rect">
               <a:avLst/>
@@ -14528,6 +14570,48 @@
           </a:p>
         </p:txBody>
       </p:sp>
+      <p:cxnSp>
+        <p:nvCxnSpPr>
+          <p:cNvPr id="3" name="Connettore diritto 2">
+            <a:extLst>
+              <a:ext uri="{FF2B5EF4-FFF2-40B4-BE49-F238E27FC236}">
+                <a16:creationId xmlns:a16="http://schemas.microsoft.com/office/drawing/2014/main" id="{569E8FE9-96BF-2839-1FBF-2018F05DB1D4}"/>
+              </a:ext>
+            </a:extLst>
+          </p:cNvPr>
+          <p:cNvCxnSpPr/>
+          <p:nvPr/>
+        </p:nvCxnSpPr>
+        <p:spPr>
+          <a:xfrm>
+            <a:off x="6108441" y="1912026"/>
+            <a:ext cx="0" cy="3592285"/>
+          </a:xfrm>
+          <a:prstGeom prst="line">
+            <a:avLst/>
+          </a:prstGeom>
+          <a:ln w="9525">
+            <a:solidFill>
+              <a:schemeClr val="tx1"/>
+            </a:solidFill>
+          </a:ln>
+          <a:effectLst/>
+        </p:spPr>
+        <p:style>
+          <a:lnRef idx="1">
+            <a:schemeClr val="accent1"/>
+          </a:lnRef>
+          <a:fillRef idx="0">
+            <a:schemeClr val="accent1"/>
+          </a:fillRef>
+          <a:effectRef idx="0">
+            <a:schemeClr val="accent1"/>
+          </a:effectRef>
+          <a:fontRef idx="minor">
+            <a:schemeClr val="tx1"/>
+          </a:fontRef>
+        </p:style>
+      </p:cxnSp>
     </p:spTree>
     <p:extLst>
       <p:ext uri="{BB962C8B-B14F-4D97-AF65-F5344CB8AC3E}">
